--- a/docs/Fluxograma_SamurAI_BlackBelt.pptx
+++ b/docs/Fluxograma_SamurAI_BlackBelt.pptx
@@ -3084,7 +3084,7 @@
     <p:bg>
       <p:bgPr>
         <a:solidFill>
-          <a:srgbClr val="F8FAFC"/>
+          <a:srgbClr val="1A1A2E"/>
         </a:solidFill>
         <a:effectLst/>
       </p:bgPr>
@@ -3098,20 +3098,90 @@
       <p:grpSpPr/>
       <p:sp>
         <p:nvSpPr>
-          <p:cNvPr id="2" name="Rounded Rectangle 1"/>
+          <p:cNvPr id="2" name="TextBox 1"/>
+          <p:cNvSpPr txBox="1"/>
+          <p:nvPr/>
+        </p:nvSpPr>
+        <p:spPr>
+          <a:xfrm>
+            <a:off x="457200" y="137160"/>
+            <a:ext cx="7315200" cy="457200"/>
+          </a:xfrm>
+          <a:prstGeom prst="rect">
+            <a:avLst/>
+          </a:prstGeom>
+          <a:noFill/>
+        </p:spPr>
+        <p:txBody>
+          <a:bodyPr wrap="none">
+            <a:spAutoFit/>
+          </a:bodyPr>
+          <a:lstStyle/>
+          <a:p>
+            <a:pPr>
+              <a:defRPr sz="2400" b="1">
+                <a:solidFill>
+                  <a:srgbClr val="C8A55A"/>
+                </a:solidFill>
+              </a:defRPr>
+            </a:pPr>
+            <a:r>
+              <a:t>SamurAI — Fluxo Completo NR-01</a:t>
+            </a:r>
+          </a:p>
+        </p:txBody>
+      </p:sp>
+      <p:sp>
+        <p:nvSpPr>
+          <p:cNvPr id="3" name="TextBox 2"/>
+          <p:cNvSpPr txBox="1"/>
+          <p:nvPr/>
+        </p:nvSpPr>
+        <p:spPr>
+          <a:xfrm>
+            <a:off x="457200" y="502920"/>
+            <a:ext cx="7315200" cy="274320"/>
+          </a:xfrm>
+          <a:prstGeom prst="rect">
+            <a:avLst/>
+          </a:prstGeom>
+          <a:noFill/>
+        </p:spPr>
+        <p:txBody>
+          <a:bodyPr wrap="none">
+            <a:spAutoFit/>
+          </a:bodyPr>
+          <a:lstStyle/>
+          <a:p>
+            <a:pPr>
+              <a:defRPr sz="1100">
+                <a:solidFill>
+                  <a:srgbClr val="999999"/>
+                </a:solidFill>
+              </a:defRPr>
+            </a:pPr>
+            <a:r>
+              <a:t>Black Belt Consultoria | Modelo Hibrido: Mensalidade + Convites COPSOQ</a:t>
+            </a:r>
+          </a:p>
+        </p:txBody>
+      </p:sp>
+      <p:sp>
+        <p:nvSpPr>
+          <p:cNvPr id="4" name="Rounded Rectangle 3"/>
           <p:cNvSpPr/>
           <p:nvPr/>
         </p:nvSpPr>
         <p:spPr>
           <a:xfrm>
-            <a:off x="274320" y="274320"/>
-            <a:ext cx="11640312" cy="1097280"/>
+            <a:off x="274320" y="914400"/>
+            <a:ext cx="1691640" cy="1280160"/>
           </a:xfrm>
           <a:prstGeom prst="roundRect">
             <a:avLst/>
           </a:prstGeom>
           <a:solidFill>
-            <a:srgbClr val="1E40AF"/>
+            <a:srgbClr val="C8A55A"/>
           </a:solidFill>
           <a:ln>
             <a:noFill/>
@@ -3135,110 +3205,71 @@
           <a:bodyPr rtlCol="0" anchor="ctr" wrap="square"/>
           <a:lstStyle/>
           <a:p>
-            <a:pPr algn="ctr"/>
-            <a:r>
-              <a:rPr sz="3200" b="1">
-                <a:solidFill>
-                  <a:srgbClr val="FFFFFF"/>
-                </a:solidFill>
-              </a:rPr>
-              <a:t>SamurAI - Fluxo Completo NR-01</a:t>
-            </a:r>
-          </a:p>
-          <a:p>
-            <a:pPr algn="ctr"/>
-            <a:r>
-              <a:rPr sz="1600">
-                <a:solidFill>
-                  <a:srgbClr val="BED0FE"/>
-                </a:solidFill>
-              </a:rPr>
-              <a:t>Black Belt Consultoria | Gestao de Riscos Psicossociais</a:t>
-            </a:r>
-          </a:p>
-        </p:txBody>
-      </p:sp>
-      <p:sp>
-        <p:nvSpPr>
-          <p:cNvPr id="3" name="Rounded Rectangle 2"/>
+            <a:pPr algn="l">
+              <a:defRPr sz="1000" b="1">
+                <a:solidFill>
+                  <a:srgbClr val="FFFFFF"/>
+                </a:solidFill>
+              </a:defRPr>
+            </a:pPr>
+            <a:r>
+              <a:t>1</a:t>
+            </a:r>
+          </a:p>
+          <a:p>
+            <a:pPr algn="ctr">
+              <a:defRPr sz="1100" b="1">
+                <a:solidFill>
+                  <a:srgbClr val="FFFFFF"/>
+                </a:solidFill>
+              </a:defRPr>
+            </a:pPr>
+            <a:r>
+              <a:t>Inserir CNPJ</a:t>
+            </a:r>
+          </a:p>
+          <a:p>
+            <a:pPr algn="ctr">
+              <a:defRPr sz="800">
+                <a:solidFill>
+                  <a:srgbClr val="FFFFFF"/>
+                </a:solidFill>
+              </a:defRPr>
+            </a:pPr>
+            <a:r>
+              <a:t>CNPJ + funcionarios</a:t>
+            </a:r>
+          </a:p>
+          <a:p>
+            <a:pPr algn="ctr">
+              <a:defRPr sz="800">
+                <a:solidFill>
+                  <a:srgbClr val="FFFFFF"/>
+                </a:solidFill>
+              </a:defRPr>
+            </a:pPr>
+            <a:r>
+              <a:t>+ email</a:t>
+            </a:r>
+          </a:p>
+        </p:txBody>
+      </p:sp>
+      <p:sp>
+        <p:nvSpPr>
+          <p:cNvPr id="5" name="Rounded Rectangle 4"/>
           <p:cNvSpPr/>
           <p:nvPr/>
         </p:nvSpPr>
         <p:spPr>
           <a:xfrm>
-            <a:off x="274320" y="1645920"/>
-            <a:ext cx="2011680" cy="777240"/>
+            <a:off x="2148840" y="914400"/>
+            <a:ext cx="1691640" cy="1280160"/>
           </a:xfrm>
           <a:prstGeom prst="roundRect">
             <a:avLst/>
           </a:prstGeom>
           <a:solidFill>
-            <a:srgbClr val="DBEAFE"/>
-          </a:solidFill>
-          <a:ln w="25400">
-            <a:solidFill>
-              <a:srgbClr val="1E40AF"/>
-            </a:solidFill>
-          </a:ln>
-        </p:spPr>
-        <p:style>
-          <a:lnRef idx="1">
-            <a:schemeClr val="accent1"/>
-          </a:lnRef>
-          <a:fillRef idx="3">
-            <a:schemeClr val="accent1"/>
-          </a:fillRef>
-          <a:effectRef idx="2">
-            <a:schemeClr val="accent1"/>
-          </a:effectRef>
-          <a:fontRef idx="minor">
-            <a:schemeClr val="lt1"/>
-          </a:fontRef>
-        </p:style>
-        <p:txBody>
-          <a:bodyPr rtlCol="0" anchor="ctr" wrap="square"/>
-          <a:lstStyle/>
-          <a:p>
-            <a:pPr algn="l"/>
-            <a:r>
-              <a:rPr sz="1000" b="1">
-                <a:solidFill>
-                  <a:srgbClr val="1F2937"/>
-                </a:solidFill>
-              </a:rPr>
-              <a:t>1. Inserir CNPJ</a:t>
-            </a:r>
-          </a:p>
-          <a:p>
-            <a:pPr algn="l"/>
-            <a:r>
-              <a:rPr sz="700">
-                <a:solidFill>
-                  <a:srgbClr val="6B7280"/>
-                </a:solidFill>
-              </a:rPr>
-              <a:t>Consultor digita CNPJ
-+ funcionarios + email</a:t>
-            </a:r>
-          </a:p>
-        </p:txBody>
-      </p:sp>
-      <p:sp>
-        <p:nvSpPr>
-          <p:cNvPr id="4" name="Right Arrow 3"/>
-          <p:cNvSpPr/>
-          <p:nvPr/>
-        </p:nvSpPr>
-        <p:spPr>
-          <a:xfrm>
-            <a:off x="2286000" y="1943100"/>
-            <a:ext cx="228600" cy="182880"/>
-          </a:xfrm>
-          <a:prstGeom prst="rightArrow">
-            <a:avLst/>
-          </a:prstGeom>
-          <a:solidFill>
-            <a:srgbClr val="6B7280"/>
+            <a:srgbClr val="C8A55A"/>
           </a:solidFill>
           <a:ln>
             <a:noFill/>
@@ -3259,94 +3290,74 @@
           </a:fontRef>
         </p:style>
         <p:txBody>
-          <a:bodyPr rtlCol="0" anchor="ctr"/>
-          <a:lstStyle/>
-          <a:p>
-            <a:pPr algn="ctr"/>
-          </a:p>
-        </p:txBody>
-      </p:sp>
-      <p:sp>
-        <p:nvSpPr>
-          <p:cNvPr id="5" name="Rounded Rectangle 4"/>
+          <a:bodyPr rtlCol="0" anchor="ctr" wrap="square"/>
+          <a:lstStyle/>
+          <a:p>
+            <a:pPr algn="l">
+              <a:defRPr sz="1000" b="1">
+                <a:solidFill>
+                  <a:srgbClr val="FFFFFF"/>
+                </a:solidFill>
+              </a:defRPr>
+            </a:pPr>
+            <a:r>
+              <a:t>2</a:t>
+            </a:r>
+          </a:p>
+          <a:p>
+            <a:pPr algn="ctr">
+              <a:defRPr sz="1100" b="1">
+                <a:solidFill>
+                  <a:srgbClr val="FFFFFF"/>
+                </a:solidFill>
+              </a:defRPr>
+            </a:pPr>
+            <a:r>
+              <a:t>Consulta Receita</a:t>
+            </a:r>
+          </a:p>
+          <a:p>
+            <a:pPr algn="ctr">
+              <a:defRPr sz="800">
+                <a:solidFill>
+                  <a:srgbClr val="FFFFFF"/>
+                </a:solidFill>
+              </a:defRPr>
+            </a:pPr>
+            <a:r>
+              <a:t>Busca automatica</a:t>
+            </a:r>
+          </a:p>
+          <a:p>
+            <a:pPr algn="ctr">
+              <a:defRPr sz="800">
+                <a:solidFill>
+                  <a:srgbClr val="FFFFFF"/>
+                </a:solidFill>
+              </a:defRPr>
+            </a:pPr>
+            <a:r>
+              <a:t>Receita Federal</a:t>
+            </a:r>
+          </a:p>
+        </p:txBody>
+      </p:sp>
+      <p:sp>
+        <p:nvSpPr>
+          <p:cNvPr id="6" name="Rounded Rectangle 5"/>
           <p:cNvSpPr/>
           <p:nvPr/>
         </p:nvSpPr>
         <p:spPr>
           <a:xfrm>
-            <a:off x="2514600" y="1645920"/>
-            <a:ext cx="2011680" cy="777240"/>
+            <a:off x="4023360" y="914400"/>
+            <a:ext cx="1691640" cy="1280160"/>
           </a:xfrm>
           <a:prstGeom prst="roundRect">
             <a:avLst/>
           </a:prstGeom>
           <a:solidFill>
-            <a:srgbClr val="DBEAFE"/>
-          </a:solidFill>
-          <a:ln w="25400">
-            <a:solidFill>
-              <a:srgbClr val="1E40AF"/>
-            </a:solidFill>
-          </a:ln>
-        </p:spPr>
-        <p:style>
-          <a:lnRef idx="1">
-            <a:schemeClr val="accent1"/>
-          </a:lnRef>
-          <a:fillRef idx="3">
-            <a:schemeClr val="accent1"/>
-          </a:fillRef>
-          <a:effectRef idx="2">
-            <a:schemeClr val="accent1"/>
-          </a:effectRef>
-          <a:fontRef idx="minor">
-            <a:schemeClr val="lt1"/>
-          </a:fontRef>
-        </p:style>
-        <p:txBody>
-          <a:bodyPr rtlCol="0" anchor="ctr" wrap="square"/>
-          <a:lstStyle/>
-          <a:p>
-            <a:pPr algn="l"/>
-            <a:r>
-              <a:rPr sz="1000" b="1">
-                <a:solidFill>
-                  <a:srgbClr val="1F2937"/>
-                </a:solidFill>
-              </a:rPr>
-              <a:t>2. Consulta Receita</a:t>
-            </a:r>
-          </a:p>
-          <a:p>
-            <a:pPr algn="l"/>
-            <a:r>
-              <a:rPr sz="700">
-                <a:solidFill>
-                  <a:srgbClr val="6B7280"/>
-                </a:solidFill>
-              </a:rPr>
-              <a:t>Busca automatica
-na Receita Federal</a:t>
-            </a:r>
-          </a:p>
-        </p:txBody>
-      </p:sp>
-      <p:sp>
-        <p:nvSpPr>
-          <p:cNvPr id="6" name="Right Arrow 5"/>
-          <p:cNvSpPr/>
-          <p:nvPr/>
-        </p:nvSpPr>
-        <p:spPr>
-          <a:xfrm>
-            <a:off x="4526280" y="1943100"/>
-            <a:ext cx="228600" cy="182880"/>
-          </a:xfrm>
-          <a:prstGeom prst="rightArrow">
-            <a:avLst/>
-          </a:prstGeom>
-          <a:solidFill>
-            <a:srgbClr val="6B7280"/>
+            <a:srgbClr val="C8A55A"/>
           </a:solidFill>
           <a:ln>
             <a:noFill/>
@@ -3367,10 +3378,55 @@
           </a:fontRef>
         </p:style>
         <p:txBody>
-          <a:bodyPr rtlCol="0" anchor="ctr"/>
-          <a:lstStyle/>
-          <a:p>
-            <a:pPr algn="ctr"/>
+          <a:bodyPr rtlCol="0" anchor="ctr" wrap="square"/>
+          <a:lstStyle/>
+          <a:p>
+            <a:pPr algn="l">
+              <a:defRPr sz="1000" b="1">
+                <a:solidFill>
+                  <a:srgbClr val="FFFFFF"/>
+                </a:solidFill>
+              </a:defRPr>
+            </a:pPr>
+            <a:r>
+              <a:t>3</a:t>
+            </a:r>
+          </a:p>
+          <a:p>
+            <a:pPr algn="ctr">
+              <a:defRPr sz="1100" b="1">
+                <a:solidFill>
+                  <a:srgbClr val="FFFFFF"/>
+                </a:solidFill>
+              </a:defRPr>
+            </a:pPr>
+            <a:r>
+              <a:t>Cadastro Empresa</a:t>
+            </a:r>
+          </a:p>
+          <a:p>
+            <a:pPr algn="ctr">
+              <a:defRPr sz="800">
+                <a:solidFill>
+                  <a:srgbClr val="FFFFFF"/>
+                </a:solidFill>
+              </a:defRPr>
+            </a:pPr>
+            <a:r>
+              <a:t>Cria tenant + checklist</a:t>
+            </a:r>
+          </a:p>
+          <a:p>
+            <a:pPr algn="ctr">
+              <a:defRPr sz="800">
+                <a:solidFill>
+                  <a:srgbClr val="FFFFFF"/>
+                </a:solidFill>
+              </a:defRPr>
+            </a:pPr>
+            <a:r>
+              <a:t>NR-01 automatico</a:t>
+            </a:r>
           </a:p>
         </p:txBody>
       </p:sp>
@@ -3382,79 +3438,14 @@
         </p:nvSpPr>
         <p:spPr>
           <a:xfrm>
-            <a:off x="4754880" y="1645920"/>
-            <a:ext cx="2011680" cy="777240"/>
+            <a:off x="5897880" y="914400"/>
+            <a:ext cx="1691640" cy="1280160"/>
           </a:xfrm>
           <a:prstGeom prst="roundRect">
             <a:avLst/>
           </a:prstGeom>
           <a:solidFill>
-            <a:srgbClr val="DCFCE7"/>
-          </a:solidFill>
-          <a:ln w="25400">
-            <a:solidFill>
-              <a:srgbClr val="16A34A"/>
-            </a:solidFill>
-          </a:ln>
-        </p:spPr>
-        <p:style>
-          <a:lnRef idx="1">
-            <a:schemeClr val="accent1"/>
-          </a:lnRef>
-          <a:fillRef idx="3">
-            <a:schemeClr val="accent1"/>
-          </a:fillRef>
-          <a:effectRef idx="2">
-            <a:schemeClr val="accent1"/>
-          </a:effectRef>
-          <a:fontRef idx="minor">
-            <a:schemeClr val="lt1"/>
-          </a:fontRef>
-        </p:style>
-        <p:txBody>
-          <a:bodyPr rtlCol="0" anchor="ctr" wrap="square"/>
-          <a:lstStyle/>
-          <a:p>
-            <a:pPr algn="l"/>
-            <a:r>
-              <a:rPr sz="1000" b="1">
-                <a:solidFill>
-                  <a:srgbClr val="1F2937"/>
-                </a:solidFill>
-              </a:rPr>
-              <a:t>3. Cadastro Empresa</a:t>
-            </a:r>
-          </a:p>
-          <a:p>
-            <a:pPr algn="l"/>
-            <a:r>
-              <a:rPr sz="700">
-                <a:solidFill>
-                  <a:srgbClr val="6B7280"/>
-                </a:solidFill>
-              </a:rPr>
-              <a:t>Cria tenant + checklist
-NR-01 automatico</a:t>
-            </a:r>
-          </a:p>
-        </p:txBody>
-      </p:sp>
-      <p:sp>
-        <p:nvSpPr>
-          <p:cNvPr id="8" name="Right Arrow 7"/>
-          <p:cNvSpPr/>
-          <p:nvPr/>
-        </p:nvSpPr>
-        <p:spPr>
-          <a:xfrm>
-            <a:off x="6766560" y="1943100"/>
-            <a:ext cx="228600" cy="182880"/>
-          </a:xfrm>
-          <a:prstGeom prst="rightArrow">
-            <a:avLst/>
-          </a:prstGeom>
-          <a:solidFill>
-            <a:srgbClr val="6B7280"/>
+            <a:srgbClr val="4A90D9"/>
           </a:solidFill>
           <a:ln>
             <a:noFill/>
@@ -3475,94 +3466,74 @@
           </a:fontRef>
         </p:style>
         <p:txBody>
-          <a:bodyPr rtlCol="0" anchor="ctr"/>
-          <a:lstStyle/>
-          <a:p>
-            <a:pPr algn="ctr"/>
-          </a:p>
-        </p:txBody>
-      </p:sp>
-      <p:sp>
-        <p:nvSpPr>
-          <p:cNvPr id="9" name="Rounded Rectangle 8"/>
+          <a:bodyPr rtlCol="0" anchor="ctr" wrap="square"/>
+          <a:lstStyle/>
+          <a:p>
+            <a:pPr algn="l">
+              <a:defRPr sz="1000" b="1">
+                <a:solidFill>
+                  <a:srgbClr val="FFFFFF"/>
+                </a:solidFill>
+              </a:defRPr>
+            </a:pPr>
+            <a:r>
+              <a:t>4</a:t>
+            </a:r>
+          </a:p>
+          <a:p>
+            <a:pPr algn="ctr">
+              <a:defRPr sz="1100" b="1">
+                <a:solidFill>
+                  <a:srgbClr val="FFFFFF"/>
+                </a:solidFill>
+              </a:defRPr>
+            </a:pPr>
+            <a:r>
+              <a:t>Pre-Proposta</a:t>
+            </a:r>
+          </a:p>
+          <a:p>
+            <a:pPr algn="ctr">
+              <a:defRPr sz="800">
+                <a:solidFill>
+                  <a:srgbClr val="FFFFFF"/>
+                </a:solidFill>
+              </a:defRPr>
+            </a:pPr>
+            <a:r>
+              <a:t>Gera estimativa</a:t>
+            </a:r>
+          </a:p>
+          <a:p>
+            <a:pPr algn="ctr">
+              <a:defRPr sz="800">
+                <a:solidFill>
+                  <a:srgbClr val="FFFFFF"/>
+                </a:solidFill>
+              </a:defRPr>
+            </a:pPr>
+            <a:r>
+              <a:t>porte/setor</a:t>
+            </a:r>
+          </a:p>
+        </p:txBody>
+      </p:sp>
+      <p:sp>
+        <p:nvSpPr>
+          <p:cNvPr id="8" name="Rounded Rectangle 7"/>
           <p:cNvSpPr/>
           <p:nvPr/>
         </p:nvSpPr>
         <p:spPr>
           <a:xfrm>
-            <a:off x="6995160" y="1645920"/>
-            <a:ext cx="2011680" cy="777240"/>
+            <a:off x="7772400" y="914400"/>
+            <a:ext cx="1691640" cy="1280160"/>
           </a:xfrm>
           <a:prstGeom prst="roundRect">
             <a:avLst/>
           </a:prstGeom>
           <a:solidFill>
-            <a:srgbClr val="FFF7ED"/>
-          </a:solidFill>
-          <a:ln w="25400">
-            <a:solidFill>
-              <a:srgbClr val="EA580C"/>
-            </a:solidFill>
-          </a:ln>
-        </p:spPr>
-        <p:style>
-          <a:lnRef idx="1">
-            <a:schemeClr val="accent1"/>
-          </a:lnRef>
-          <a:fillRef idx="3">
-            <a:schemeClr val="accent1"/>
-          </a:fillRef>
-          <a:effectRef idx="2">
-            <a:schemeClr val="accent1"/>
-          </a:effectRef>
-          <a:fontRef idx="minor">
-            <a:schemeClr val="lt1"/>
-          </a:fontRef>
-        </p:style>
-        <p:txBody>
-          <a:bodyPr rtlCol="0" anchor="ctr" wrap="square"/>
-          <a:lstStyle/>
-          <a:p>
-            <a:pPr algn="l"/>
-            <a:r>
-              <a:rPr sz="1000" b="1">
-                <a:solidFill>
-                  <a:srgbClr val="1F2937"/>
-                </a:solidFill>
-              </a:rPr>
-              <a:t>4. Pre-Proposta</a:t>
-            </a:r>
-          </a:p>
-          <a:p>
-            <a:pPr algn="l"/>
-            <a:r>
-              <a:rPr sz="700">
-                <a:solidFill>
-                  <a:srgbClr val="6B7280"/>
-                </a:solidFill>
-              </a:rPr>
-              <a:t>Gera estimativa com
-base no porte/setor</a:t>
-            </a:r>
-          </a:p>
-        </p:txBody>
-      </p:sp>
-      <p:sp>
-        <p:nvSpPr>
-          <p:cNvPr id="10" name="Right Arrow 9"/>
-          <p:cNvSpPr/>
-          <p:nvPr/>
-        </p:nvSpPr>
-        <p:spPr>
-          <a:xfrm>
-            <a:off x="9006840" y="1943100"/>
-            <a:ext cx="228600" cy="182880"/>
-          </a:xfrm>
-          <a:prstGeom prst="rightArrow">
-            <a:avLst/>
-          </a:prstGeom>
-          <a:solidFill>
-            <a:srgbClr val="6B7280"/>
+            <a:srgbClr val="4A90D9"/>
           </a:solidFill>
           <a:ln>
             <a:noFill/>
@@ -3583,94 +3554,74 @@
           </a:fontRef>
         </p:style>
         <p:txBody>
-          <a:bodyPr rtlCol="0" anchor="ctr"/>
-          <a:lstStyle/>
-          <a:p>
-            <a:pPr algn="ctr"/>
-          </a:p>
-        </p:txBody>
-      </p:sp>
-      <p:sp>
-        <p:nvSpPr>
-          <p:cNvPr id="11" name="Rounded Rectangle 10"/>
+          <a:bodyPr rtlCol="0" anchor="ctr" wrap="square"/>
+          <a:lstStyle/>
+          <a:p>
+            <a:pPr algn="l">
+              <a:defRPr sz="1000" b="1">
+                <a:solidFill>
+                  <a:srgbClr val="FFFFFF"/>
+                </a:solidFill>
+              </a:defRPr>
+            </a:pPr>
+            <a:r>
+              <a:t>5</a:t>
+            </a:r>
+          </a:p>
+          <a:p>
+            <a:pPr algn="ctr">
+              <a:defRPr sz="1100" b="1">
+                <a:solidFill>
+                  <a:srgbClr val="FFFFFF"/>
+                </a:solidFill>
+              </a:defRPr>
+            </a:pPr>
+            <a:r>
+              <a:t>Editar Proposta</a:t>
+            </a:r>
+          </a:p>
+          <a:p>
+            <a:pPr algn="ctr">
+              <a:defRPr sz="800">
+                <a:solidFill>
+                  <a:srgbClr val="FFFFFF"/>
+                </a:solidFill>
+              </a:defRPr>
+            </a:pPr>
+            <a:r>
+              <a:t>Modal visual para</a:t>
+            </a:r>
+          </a:p>
+          <a:p>
+            <a:pPr algn="ctr">
+              <a:defRPr sz="800">
+                <a:solidFill>
+                  <a:srgbClr val="FFFFFF"/>
+                </a:solidFill>
+              </a:defRPr>
+            </a:pPr>
+            <a:r>
+              <a:t>ajustar valores</a:t>
+            </a:r>
+          </a:p>
+        </p:txBody>
+      </p:sp>
+      <p:sp>
+        <p:nvSpPr>
+          <p:cNvPr id="9" name="Rounded Rectangle 8"/>
           <p:cNvSpPr/>
           <p:nvPr/>
         </p:nvSpPr>
         <p:spPr>
           <a:xfrm>
-            <a:off x="9235440" y="1645920"/>
-            <a:ext cx="2011680" cy="777240"/>
+            <a:off x="9646920" y="914400"/>
+            <a:ext cx="1691640" cy="1280160"/>
           </a:xfrm>
           <a:prstGeom prst="roundRect">
             <a:avLst/>
           </a:prstGeom>
           <a:solidFill>
-            <a:srgbClr val="FFF7ED"/>
-          </a:solidFill>
-          <a:ln w="25400">
-            <a:solidFill>
-              <a:srgbClr val="EA580C"/>
-            </a:solidFill>
-          </a:ln>
-        </p:spPr>
-        <p:style>
-          <a:lnRef idx="1">
-            <a:schemeClr val="accent1"/>
-          </a:lnRef>
-          <a:fillRef idx="3">
-            <a:schemeClr val="accent1"/>
-          </a:fillRef>
-          <a:effectRef idx="2">
-            <a:schemeClr val="accent1"/>
-          </a:effectRef>
-          <a:fontRef idx="minor">
-            <a:schemeClr val="lt1"/>
-          </a:fontRef>
-        </p:style>
-        <p:txBody>
-          <a:bodyPr rtlCol="0" anchor="ctr" wrap="square"/>
-          <a:lstStyle/>
-          <a:p>
-            <a:pPr algn="l"/>
-            <a:r>
-              <a:rPr sz="1000" b="1">
-                <a:solidFill>
-                  <a:srgbClr val="1F2937"/>
-                </a:solidFill>
-              </a:rPr>
-              <a:t>5. Editar Proposta</a:t>
-            </a:r>
-          </a:p>
-          <a:p>
-            <a:pPr algn="l"/>
-            <a:r>
-              <a:rPr sz="700">
-                <a:solidFill>
-                  <a:srgbClr val="6B7280"/>
-                </a:solidFill>
-              </a:rPr>
-              <a:t>Modal visual para
-ajustar valores/itens</a:t>
-            </a:r>
-          </a:p>
-        </p:txBody>
-      </p:sp>
-      <p:sp>
-        <p:nvSpPr>
-          <p:cNvPr id="12" name="Down Arrow 11"/>
-          <p:cNvSpPr/>
-          <p:nvPr/>
-        </p:nvSpPr>
-        <p:spPr>
-          <a:xfrm>
-            <a:off x="10149840" y="2423160"/>
-            <a:ext cx="182880" cy="137160"/>
-          </a:xfrm>
-          <a:prstGeom prst="downArrow">
-            <a:avLst/>
-          </a:prstGeom>
-          <a:solidFill>
-            <a:srgbClr val="6B7280"/>
+            <a:srgbClr val="E74C3C"/>
           </a:solidFill>
           <a:ln>
             <a:noFill/>
@@ -3691,94 +3642,74 @@
           </a:fontRef>
         </p:style>
         <p:txBody>
-          <a:bodyPr rtlCol="0" anchor="ctr"/>
-          <a:lstStyle/>
-          <a:p>
-            <a:pPr algn="ctr"/>
-          </a:p>
-        </p:txBody>
-      </p:sp>
-      <p:sp>
-        <p:nvSpPr>
-          <p:cNvPr id="13" name="Rounded Rectangle 12"/>
+          <a:bodyPr rtlCol="0" anchor="ctr" wrap="square"/>
+          <a:lstStyle/>
+          <a:p>
+            <a:pPr algn="l">
+              <a:defRPr sz="1000" b="1">
+                <a:solidFill>
+                  <a:srgbClr val="FFFFFF"/>
+                </a:solidFill>
+              </a:defRPr>
+            </a:pPr>
+            <a:r>
+              <a:t>6</a:t>
+            </a:r>
+          </a:p>
+          <a:p>
+            <a:pPr algn="ctr">
+              <a:defRPr sz="1100" b="1">
+                <a:solidFill>
+                  <a:srgbClr val="FFFFFF"/>
+                </a:solidFill>
+              </a:defRPr>
+            </a:pPr>
+            <a:r>
+              <a:t>Enviar por Email</a:t>
+            </a:r>
+          </a:p>
+          <a:p>
+            <a:pPr algn="ctr">
+              <a:defRPr sz="800">
+                <a:solidFill>
+                  <a:srgbClr val="FFFFFF"/>
+                </a:solidFill>
+              </a:defRPr>
+            </a:pPr>
+            <a:r>
+              <a:t>Email + botoes</a:t>
+            </a:r>
+          </a:p>
+          <a:p>
+            <a:pPr algn="ctr">
+              <a:defRPr sz="800">
+                <a:solidFill>
+                  <a:srgbClr val="FFFFFF"/>
+                </a:solidFill>
+              </a:defRPr>
+            </a:pPr>
+            <a:r>
+              <a:t>Aprovar/Recusar</a:t>
+            </a:r>
+          </a:p>
+        </p:txBody>
+      </p:sp>
+      <p:sp>
+        <p:nvSpPr>
+          <p:cNvPr id="10" name="Rounded Rectangle 9"/>
           <p:cNvSpPr/>
           <p:nvPr/>
         </p:nvSpPr>
         <p:spPr>
           <a:xfrm>
-            <a:off x="274320" y="2560320"/>
-            <a:ext cx="2011680" cy="777240"/>
+            <a:off x="9646920" y="2560320"/>
+            <a:ext cx="1691640" cy="1280160"/>
           </a:xfrm>
           <a:prstGeom prst="roundRect">
             <a:avLst/>
           </a:prstGeom>
           <a:solidFill>
-            <a:srgbClr val="FEF2F2"/>
-          </a:solidFill>
-          <a:ln w="25400">
-            <a:solidFill>
-              <a:srgbClr val="DC2626"/>
-            </a:solidFill>
-          </a:ln>
-        </p:spPr>
-        <p:style>
-          <a:lnRef idx="1">
-            <a:schemeClr val="accent1"/>
-          </a:lnRef>
-          <a:fillRef idx="3">
-            <a:schemeClr val="accent1"/>
-          </a:fillRef>
-          <a:effectRef idx="2">
-            <a:schemeClr val="accent1"/>
-          </a:effectRef>
-          <a:fontRef idx="minor">
-            <a:schemeClr val="lt1"/>
-          </a:fontRef>
-        </p:style>
-        <p:txBody>
-          <a:bodyPr rtlCol="0" anchor="ctr" wrap="square"/>
-          <a:lstStyle/>
-          <a:p>
-            <a:pPr algn="l"/>
-            <a:r>
-              <a:rPr sz="1000" b="1">
-                <a:solidFill>
-                  <a:srgbClr val="1F2937"/>
-                </a:solidFill>
-              </a:rPr>
-              <a:t>10. Enviar COPSOQ</a:t>
-            </a:r>
-          </a:p>
-          <a:p>
-            <a:pPr algn="l"/>
-            <a:r>
-              <a:rPr sz="700">
-                <a:solidFill>
-                  <a:srgbClr val="6B7280"/>
-                </a:solidFill>
-              </a:rPr>
-              <a:t>Dispara questionarios
-por email</a:t>
-            </a:r>
-          </a:p>
-        </p:txBody>
-      </p:sp>
-      <p:sp>
-        <p:nvSpPr>
-          <p:cNvPr id="14" name="Right Arrow 13"/>
-          <p:cNvSpPr/>
-          <p:nvPr/>
-        </p:nvSpPr>
-        <p:spPr>
-          <a:xfrm>
-            <a:off x="2286000" y="2857500"/>
-            <a:ext cx="228600" cy="182880"/>
-          </a:xfrm>
-          <a:prstGeom prst="rightArrow">
-            <a:avLst/>
-          </a:prstGeom>
-          <a:solidFill>
-            <a:srgbClr val="6B7280"/>
+            <a:srgbClr val="E74C3C"/>
           </a:solidFill>
           <a:ln>
             <a:noFill/>
@@ -3799,94 +3730,74 @@
           </a:fontRef>
         </p:style>
         <p:txBody>
-          <a:bodyPr rtlCol="0" anchor="ctr"/>
-          <a:lstStyle/>
-          <a:p>
-            <a:pPr algn="ctr"/>
-          </a:p>
-        </p:txBody>
-      </p:sp>
-      <p:sp>
-        <p:nvSpPr>
-          <p:cNvPr id="15" name="Rounded Rectangle 14"/>
+          <a:bodyPr rtlCol="0" anchor="ctr" wrap="square"/>
+          <a:lstStyle/>
+          <a:p>
+            <a:pPr algn="l">
+              <a:defRPr sz="1000" b="1">
+                <a:solidFill>
+                  <a:srgbClr val="FFFFFF"/>
+                </a:solidFill>
+              </a:defRPr>
+            </a:pPr>
+            <a:r>
+              <a:t>7</a:t>
+            </a:r>
+          </a:p>
+          <a:p>
+            <a:pPr algn="ctr">
+              <a:defRPr sz="1100" b="1">
+                <a:solidFill>
+                  <a:srgbClr val="FFFFFF"/>
+                </a:solidFill>
+              </a:defRPr>
+            </a:pPr>
+            <a:r>
+              <a:t>Aprovacao Email</a:t>
+            </a:r>
+          </a:p>
+          <a:p>
+            <a:pPr algn="ctr">
+              <a:defRPr sz="800">
+                <a:solidFill>
+                  <a:srgbClr val="FFFFFF"/>
+                </a:solidFill>
+              </a:defRPr>
+            </a:pPr>
+            <a:r>
+              <a:t>Empresa aprova</a:t>
+            </a:r>
+          </a:p>
+          <a:p>
+            <a:pPr algn="ctr">
+              <a:defRPr sz="800">
+                <a:solidFill>
+                  <a:srgbClr val="FFFFFF"/>
+                </a:solidFill>
+              </a:defRPr>
+            </a:pPr>
+            <a:r>
+              <a:t>pelo email</a:t>
+            </a:r>
+          </a:p>
+        </p:txBody>
+      </p:sp>
+      <p:sp>
+        <p:nvSpPr>
+          <p:cNvPr id="11" name="Rounded Rectangle 10"/>
           <p:cNvSpPr/>
           <p:nvPr/>
         </p:nvSpPr>
         <p:spPr>
           <a:xfrm>
-            <a:off x="2514600" y="2560320"/>
-            <a:ext cx="2011680" cy="777240"/>
+            <a:off x="7772400" y="2560320"/>
+            <a:ext cx="1691640" cy="1280160"/>
           </a:xfrm>
           <a:prstGeom prst="roundRect">
             <a:avLst/>
           </a:prstGeom>
           <a:solidFill>
-            <a:srgbClr val="F5F3FF"/>
-          </a:solidFill>
-          <a:ln w="25400">
-            <a:solidFill>
-              <a:srgbClr val="7C3AED"/>
-            </a:solidFill>
-          </a:ln>
-        </p:spPr>
-        <p:style>
-          <a:lnRef idx="1">
-            <a:schemeClr val="accent1"/>
-          </a:lnRef>
-          <a:fillRef idx="3">
-            <a:schemeClr val="accent1"/>
-          </a:fillRef>
-          <a:effectRef idx="2">
-            <a:schemeClr val="accent1"/>
-          </a:effectRef>
-          <a:fontRef idx="minor">
-            <a:schemeClr val="lt1"/>
-          </a:fontRef>
-        </p:style>
-        <p:txBody>
-          <a:bodyPr rtlCol="0" anchor="ctr" wrap="square"/>
-          <a:lstStyle/>
-          <a:p>
-            <a:pPr algn="l"/>
-            <a:r>
-              <a:rPr sz="1000" b="1">
-                <a:solidFill>
-                  <a:srgbClr val="1F2937"/>
-                </a:solidFill>
-              </a:rPr>
-              <a:t>9. Cadastrar Pessoas</a:t>
-            </a:r>
-          </a:p>
-          <a:p>
-            <a:pPr algn="l"/>
-            <a:r>
-              <a:rPr sz="700">
-                <a:solidFill>
-                  <a:srgbClr val="6B7280"/>
-                </a:solidFill>
-              </a:rPr>
-              <a:t>Empresa cadastra setores
-e colaboradores</a:t>
-            </a:r>
-          </a:p>
-        </p:txBody>
-      </p:sp>
-      <p:sp>
-        <p:nvSpPr>
-          <p:cNvPr id="16" name="Right Arrow 15"/>
-          <p:cNvSpPr/>
-          <p:nvPr/>
-        </p:nvSpPr>
-        <p:spPr>
-          <a:xfrm>
-            <a:off x="4526280" y="2857500"/>
-            <a:ext cx="228600" cy="182880"/>
-          </a:xfrm>
-          <a:prstGeom prst="rightArrow">
-            <a:avLst/>
-          </a:prstGeom>
-          <a:solidFill>
-            <a:srgbClr val="6B7280"/>
+            <a:srgbClr val="27AE60"/>
           </a:solidFill>
           <a:ln>
             <a:noFill/>
@@ -3907,94 +3818,74 @@
           </a:fontRef>
         </p:style>
         <p:txBody>
-          <a:bodyPr rtlCol="0" anchor="ctr"/>
-          <a:lstStyle/>
-          <a:p>
-            <a:pPr algn="ctr"/>
-          </a:p>
-        </p:txBody>
-      </p:sp>
-      <p:sp>
-        <p:nvSpPr>
-          <p:cNvPr id="17" name="Rounded Rectangle 16"/>
+          <a:bodyPr rtlCol="0" anchor="ctr" wrap="square"/>
+          <a:lstStyle/>
+          <a:p>
+            <a:pPr algn="l">
+              <a:defRPr sz="1000" b="1">
+                <a:solidFill>
+                  <a:srgbClr val="FFFFFF"/>
+                </a:solidFill>
+              </a:defRPr>
+            </a:pPr>
+            <a:r>
+              <a:t>8</a:t>
+            </a:r>
+          </a:p>
+          <a:p>
+            <a:pPr algn="ctr">
+              <a:defRPr sz="1100" b="1">
+                <a:solidFill>
+                  <a:srgbClr val="FFFFFF"/>
+                </a:solidFill>
+              </a:defRPr>
+            </a:pPr>
+            <a:r>
+              <a:t>Criar Conta</a:t>
+            </a:r>
+          </a:p>
+          <a:p>
+            <a:pPr algn="ctr">
+              <a:defRPr sz="800">
+                <a:solidFill>
+                  <a:srgbClr val="FFFFFF"/>
+                </a:solidFill>
+              </a:defRPr>
+            </a:pPr>
+            <a:r>
+              <a:t>Auto-cria usuario</a:t>
+            </a:r>
+          </a:p>
+          <a:p>
+            <a:pPr algn="ctr">
+              <a:defRPr sz="800">
+                <a:solidFill>
+                  <a:srgbClr val="FFFFFF"/>
+                </a:solidFill>
+              </a:defRPr>
+            </a:pPr>
+            <a:r>
+              <a:t>+ credenciais</a:t>
+            </a:r>
+          </a:p>
+        </p:txBody>
+      </p:sp>
+      <p:sp>
+        <p:nvSpPr>
+          <p:cNvPr id="12" name="Rounded Rectangle 11"/>
           <p:cNvSpPr/>
           <p:nvPr/>
         </p:nvSpPr>
         <p:spPr>
           <a:xfrm>
-            <a:off x="4754880" y="2560320"/>
-            <a:ext cx="2011680" cy="777240"/>
+            <a:off x="5897880" y="2560320"/>
+            <a:ext cx="1691640" cy="1280160"/>
           </a:xfrm>
           <a:prstGeom prst="roundRect">
             <a:avLst/>
           </a:prstGeom>
           <a:solidFill>
-            <a:srgbClr val="F5F3FF"/>
-          </a:solidFill>
-          <a:ln w="25400">
-            <a:solidFill>
-              <a:srgbClr val="7C3AED"/>
-            </a:solidFill>
-          </a:ln>
-        </p:spPr>
-        <p:style>
-          <a:lnRef idx="1">
-            <a:schemeClr val="accent1"/>
-          </a:lnRef>
-          <a:fillRef idx="3">
-            <a:schemeClr val="accent1"/>
-          </a:fillRef>
-          <a:effectRef idx="2">
-            <a:schemeClr val="accent1"/>
-          </a:effectRef>
-          <a:fontRef idx="minor">
-            <a:schemeClr val="lt1"/>
-          </a:fontRef>
-        </p:style>
-        <p:txBody>
-          <a:bodyPr rtlCol="0" anchor="ctr" wrap="square"/>
-          <a:lstStyle/>
-          <a:p>
-            <a:pPr algn="l"/>
-            <a:r>
-              <a:rPr sz="1000" b="1">
-                <a:solidFill>
-                  <a:srgbClr val="1F2937"/>
-                </a:solidFill>
-              </a:rPr>
-              <a:t>8. Criar Conta</a:t>
-            </a:r>
-          </a:p>
-          <a:p>
-            <a:pPr algn="l"/>
-            <a:r>
-              <a:rPr sz="700">
-                <a:solidFill>
-                  <a:srgbClr val="6B7280"/>
-                </a:solidFill>
-              </a:rPr>
-              <a:t>Auto-cria usuario +
-envia credenciais</a:t>
-            </a:r>
-          </a:p>
-        </p:txBody>
-      </p:sp>
-      <p:sp>
-        <p:nvSpPr>
-          <p:cNvPr id="18" name="Right Arrow 17"/>
-          <p:cNvSpPr/>
-          <p:nvPr/>
-        </p:nvSpPr>
-        <p:spPr>
-          <a:xfrm>
-            <a:off x="6766560" y="2857500"/>
-            <a:ext cx="228600" cy="182880"/>
-          </a:xfrm>
-          <a:prstGeom prst="rightArrow">
-            <a:avLst/>
-          </a:prstGeom>
-          <a:solidFill>
-            <a:srgbClr val="6B7280"/>
+            <a:srgbClr val="27AE60"/>
           </a:solidFill>
           <a:ln>
             <a:noFill/>
@@ -4015,94 +3906,74 @@
           </a:fontRef>
         </p:style>
         <p:txBody>
-          <a:bodyPr rtlCol="0" anchor="ctr"/>
-          <a:lstStyle/>
-          <a:p>
-            <a:pPr algn="ctr"/>
-          </a:p>
-        </p:txBody>
-      </p:sp>
-      <p:sp>
-        <p:nvSpPr>
-          <p:cNvPr id="19" name="Rounded Rectangle 18"/>
+          <a:bodyPr rtlCol="0" anchor="ctr" wrap="square"/>
+          <a:lstStyle/>
+          <a:p>
+            <a:pPr algn="l">
+              <a:defRPr sz="1000" b="1">
+                <a:solidFill>
+                  <a:srgbClr val="FFFFFF"/>
+                </a:solidFill>
+              </a:defRPr>
+            </a:pPr>
+            <a:r>
+              <a:t>9</a:t>
+            </a:r>
+          </a:p>
+          <a:p>
+            <a:pPr algn="ctr">
+              <a:defRPr sz="1100" b="1">
+                <a:solidFill>
+                  <a:srgbClr val="FFFFFF"/>
+                </a:solidFill>
+              </a:defRPr>
+            </a:pPr>
+            <a:r>
+              <a:t>Cadastrar Pessoas</a:t>
+            </a:r>
+          </a:p>
+          <a:p>
+            <a:pPr algn="ctr">
+              <a:defRPr sz="800">
+                <a:solidFill>
+                  <a:srgbClr val="FFFFFF"/>
+                </a:solidFill>
+              </a:defRPr>
+            </a:pPr>
+            <a:r>
+              <a:t>Empresa cadastra</a:t>
+            </a:r>
+          </a:p>
+          <a:p>
+            <a:pPr algn="ctr">
+              <a:defRPr sz="800">
+                <a:solidFill>
+                  <a:srgbClr val="FFFFFF"/>
+                </a:solidFill>
+              </a:defRPr>
+            </a:pPr>
+            <a:r>
+              <a:t>setores/colaboradores</a:t>
+            </a:r>
+          </a:p>
+        </p:txBody>
+      </p:sp>
+      <p:sp>
+        <p:nvSpPr>
+          <p:cNvPr id="13" name="Rounded Rectangle 12"/>
           <p:cNvSpPr/>
           <p:nvPr/>
         </p:nvSpPr>
         <p:spPr>
           <a:xfrm>
-            <a:off x="6995160" y="2560320"/>
-            <a:ext cx="2011680" cy="777240"/>
+            <a:off x="4023360" y="2560320"/>
+            <a:ext cx="1691640" cy="1280160"/>
           </a:xfrm>
           <a:prstGeom prst="roundRect">
             <a:avLst/>
           </a:prstGeom>
           <a:solidFill>
-            <a:srgbClr val="DCFCE7"/>
-          </a:solidFill>
-          <a:ln w="25400">
-            <a:solidFill>
-              <a:srgbClr val="16A34A"/>
-            </a:solidFill>
-          </a:ln>
-        </p:spPr>
-        <p:style>
-          <a:lnRef idx="1">
-            <a:schemeClr val="accent1"/>
-          </a:lnRef>
-          <a:fillRef idx="3">
-            <a:schemeClr val="accent1"/>
-          </a:fillRef>
-          <a:effectRef idx="2">
-            <a:schemeClr val="accent1"/>
-          </a:effectRef>
-          <a:fontRef idx="minor">
-            <a:schemeClr val="lt1"/>
-          </a:fontRef>
-        </p:style>
-        <p:txBody>
-          <a:bodyPr rtlCol="0" anchor="ctr" wrap="square"/>
-          <a:lstStyle/>
-          <a:p>
-            <a:pPr algn="l"/>
-            <a:r>
-              <a:rPr sz="1000" b="1">
-                <a:solidFill>
-                  <a:srgbClr val="1F2937"/>
-                </a:solidFill>
-              </a:rPr>
-              <a:t>7. Aprovacao Email</a:t>
-            </a:r>
-          </a:p>
-          <a:p>
-            <a:pPr algn="l"/>
-            <a:r>
-              <a:rPr sz="700">
-                <a:solidFill>
-                  <a:srgbClr val="6B7280"/>
-                </a:solidFill>
-              </a:rPr>
-              <a:t>Empresa clica Aprovar
-no email recebido</a:t>
-            </a:r>
-          </a:p>
-        </p:txBody>
-      </p:sp>
-      <p:sp>
-        <p:nvSpPr>
-          <p:cNvPr id="20" name="Right Arrow 19"/>
-          <p:cNvSpPr/>
-          <p:nvPr/>
-        </p:nvSpPr>
-        <p:spPr>
-          <a:xfrm>
-            <a:off x="9006840" y="2857500"/>
-            <a:ext cx="228600" cy="182880"/>
-          </a:xfrm>
-          <a:prstGeom prst="rightArrow">
-            <a:avLst/>
-          </a:prstGeom>
-          <a:solidFill>
-            <a:srgbClr val="6B7280"/>
+            <a:srgbClr val="F39C12"/>
           </a:solidFill>
           <a:ln>
             <a:noFill/>
@@ -4123,94 +3994,74 @@
           </a:fontRef>
         </p:style>
         <p:txBody>
-          <a:bodyPr rtlCol="0" anchor="ctr"/>
-          <a:lstStyle/>
-          <a:p>
-            <a:pPr algn="ctr"/>
-          </a:p>
-        </p:txBody>
-      </p:sp>
-      <p:sp>
-        <p:nvSpPr>
-          <p:cNvPr id="21" name="Rounded Rectangle 20"/>
+          <a:bodyPr rtlCol="0" anchor="ctr" wrap="square"/>
+          <a:lstStyle/>
+          <a:p>
+            <a:pPr algn="l">
+              <a:defRPr sz="1000" b="1">
+                <a:solidFill>
+                  <a:srgbClr val="FFFFFF"/>
+                </a:solidFill>
+              </a:defRPr>
+            </a:pPr>
+            <a:r>
+              <a:t>10</a:t>
+            </a:r>
+          </a:p>
+          <a:p>
+            <a:pPr algn="ctr">
+              <a:defRPr sz="1100" b="1">
+                <a:solidFill>
+                  <a:srgbClr val="FFFFFF"/>
+                </a:solidFill>
+              </a:defRPr>
+            </a:pPr>
+            <a:r>
+              <a:t>Verificar Billing</a:t>
+            </a:r>
+          </a:p>
+          <a:p>
+            <a:pPr algn="ctr">
+              <a:defRPr sz="800">
+                <a:solidFill>
+                  <a:srgbClr val="FFFFFF"/>
+                </a:solidFill>
+              </a:defRPr>
+            </a:pPr>
+            <a:r>
+              <a:t>Verifica excedentes</a:t>
+            </a:r>
+          </a:p>
+          <a:p>
+            <a:pPr algn="ctr">
+              <a:defRPr sz="800">
+                <a:solidFill>
+                  <a:srgbClr val="FFFFFF"/>
+                </a:solidFill>
+              </a:defRPr>
+            </a:pPr>
+            <a:r>
+              <a:t>PIX/Cartao/Creditos</a:t>
+            </a:r>
+          </a:p>
+        </p:txBody>
+      </p:sp>
+      <p:sp>
+        <p:nvSpPr>
+          <p:cNvPr id="14" name="Rounded Rectangle 13"/>
           <p:cNvSpPr/>
           <p:nvPr/>
         </p:nvSpPr>
         <p:spPr>
           <a:xfrm>
-            <a:off x="9235440" y="2560320"/>
-            <a:ext cx="2011680" cy="777240"/>
+            <a:off x="2148840" y="2560320"/>
+            <a:ext cx="1691640" cy="1280160"/>
           </a:xfrm>
           <a:prstGeom prst="roundRect">
             <a:avLst/>
           </a:prstGeom>
           <a:solidFill>
-            <a:srgbClr val="DCFCE7"/>
-          </a:solidFill>
-          <a:ln w="25400">
-            <a:solidFill>
-              <a:srgbClr val="16A34A"/>
-            </a:solidFill>
-          </a:ln>
-        </p:spPr>
-        <p:style>
-          <a:lnRef idx="1">
-            <a:schemeClr val="accent1"/>
-          </a:lnRef>
-          <a:fillRef idx="3">
-            <a:schemeClr val="accent1"/>
-          </a:fillRef>
-          <a:effectRef idx="2">
-            <a:schemeClr val="accent1"/>
-          </a:effectRef>
-          <a:fontRef idx="minor">
-            <a:schemeClr val="lt1"/>
-          </a:fontRef>
-        </p:style>
-        <p:txBody>
-          <a:bodyPr rtlCol="0" anchor="ctr" wrap="square"/>
-          <a:lstStyle/>
-          <a:p>
-            <a:pPr algn="l"/>
-            <a:r>
-              <a:rPr sz="1000" b="1">
-                <a:solidFill>
-                  <a:srgbClr val="1F2937"/>
-                </a:solidFill>
-              </a:rPr>
-              <a:t>6. Enviar por Email</a:t>
-            </a:r>
-          </a:p>
-          <a:p>
-            <a:pPr algn="l"/>
-            <a:r>
-              <a:rPr sz="700">
-                <a:solidFill>
-                  <a:srgbClr val="6B7280"/>
-                </a:solidFill>
-              </a:rPr>
-              <a:t>Email com proposta
-+ botoes Aprovar/Recusar</a:t>
-            </a:r>
-          </a:p>
-        </p:txBody>
-      </p:sp>
-      <p:sp>
-        <p:nvSpPr>
-          <p:cNvPr id="22" name="Down Arrow 21"/>
-          <p:cNvSpPr/>
-          <p:nvPr/>
-        </p:nvSpPr>
-        <p:spPr>
-          <a:xfrm>
-            <a:off x="1188720" y="3337560"/>
-            <a:ext cx="182880" cy="137160"/>
-          </a:xfrm>
-          <a:prstGeom prst="downArrow">
-            <a:avLst/>
-          </a:prstGeom>
-          <a:solidFill>
-            <a:srgbClr val="6B7280"/>
+            <a:srgbClr val="8E44AD"/>
           </a:solidFill>
           <a:ln>
             <a:noFill/>
@@ -4231,94 +4082,74 @@
           </a:fontRef>
         </p:style>
         <p:txBody>
-          <a:bodyPr rtlCol="0" anchor="ctr"/>
-          <a:lstStyle/>
-          <a:p>
-            <a:pPr algn="ctr"/>
-          </a:p>
-        </p:txBody>
-      </p:sp>
-      <p:sp>
-        <p:nvSpPr>
-          <p:cNvPr id="23" name="Rounded Rectangle 22"/>
+          <a:bodyPr rtlCol="0" anchor="ctr" wrap="square"/>
+          <a:lstStyle/>
+          <a:p>
+            <a:pPr algn="l">
+              <a:defRPr sz="1000" b="1">
+                <a:solidFill>
+                  <a:srgbClr val="FFFFFF"/>
+                </a:solidFill>
+              </a:defRPr>
+            </a:pPr>
+            <a:r>
+              <a:t>11</a:t>
+            </a:r>
+          </a:p>
+          <a:p>
+            <a:pPr algn="ctr">
+              <a:defRPr sz="1100" b="1">
+                <a:solidFill>
+                  <a:srgbClr val="FFFFFF"/>
+                </a:solidFill>
+              </a:defRPr>
+            </a:pPr>
+            <a:r>
+              <a:t>Enviar COPSOQ</a:t>
+            </a:r>
+          </a:p>
+          <a:p>
+            <a:pPr algn="ctr">
+              <a:defRPr sz="800">
+                <a:solidFill>
+                  <a:srgbClr val="FFFFFF"/>
+                </a:solidFill>
+              </a:defRPr>
+            </a:pPr>
+            <a:r>
+              <a:t>Dispara questionarios</a:t>
+            </a:r>
+          </a:p>
+          <a:p>
+            <a:pPr algn="ctr">
+              <a:defRPr sz="800">
+                <a:solidFill>
+                  <a:srgbClr val="FFFFFF"/>
+                </a:solidFill>
+              </a:defRPr>
+            </a:pPr>
+            <a:r>
+              <a:t>por email</a:t>
+            </a:r>
+          </a:p>
+        </p:txBody>
+      </p:sp>
+      <p:sp>
+        <p:nvSpPr>
+          <p:cNvPr id="15" name="Rounded Rectangle 14"/>
           <p:cNvSpPr/>
           <p:nvPr/>
         </p:nvSpPr>
         <p:spPr>
           <a:xfrm>
-            <a:off x="274320" y="3474720"/>
-            <a:ext cx="2011680" cy="777240"/>
+            <a:off x="274320" y="2560320"/>
+            <a:ext cx="1691640" cy="1280160"/>
           </a:xfrm>
           <a:prstGeom prst="roundRect">
             <a:avLst/>
           </a:prstGeom>
           <a:solidFill>
-            <a:srgbClr val="FEF2F2"/>
-          </a:solidFill>
-          <a:ln w="25400">
-            <a:solidFill>
-              <a:srgbClr val="DC2626"/>
-            </a:solidFill>
-          </a:ln>
-        </p:spPr>
-        <p:style>
-          <a:lnRef idx="1">
-            <a:schemeClr val="accent1"/>
-          </a:lnRef>
-          <a:fillRef idx="3">
-            <a:schemeClr val="accent1"/>
-          </a:fillRef>
-          <a:effectRef idx="2">
-            <a:schemeClr val="accent1"/>
-          </a:effectRef>
-          <a:fontRef idx="minor">
-            <a:schemeClr val="lt1"/>
-          </a:fontRef>
-        </p:style>
-        <p:txBody>
-          <a:bodyPr rtlCol="0" anchor="ctr" wrap="square"/>
-          <a:lstStyle/>
-          <a:p>
-            <a:pPr algn="l"/>
-            <a:r>
-              <a:rPr sz="1000" b="1">
-                <a:solidFill>
-                  <a:srgbClr val="1F2937"/>
-                </a:solidFill>
-              </a:rPr>
-              <a:t>11. Respostas COPSOQ</a:t>
-            </a:r>
-          </a:p>
-          <a:p>
-            <a:pPr algn="l"/>
-            <a:r>
-              <a:rPr sz="700">
-                <a:solidFill>
-                  <a:srgbClr val="6B7280"/>
-                </a:solidFill>
-              </a:rPr>
-              <a:t>Colaboradores respondem
-(anonimo, 7 dias)</a:t>
-            </a:r>
-          </a:p>
-        </p:txBody>
-      </p:sp>
-      <p:sp>
-        <p:nvSpPr>
-          <p:cNvPr id="24" name="Right Arrow 23"/>
-          <p:cNvSpPr/>
-          <p:nvPr/>
-        </p:nvSpPr>
-        <p:spPr>
-          <a:xfrm>
-            <a:off x="2286000" y="3771900"/>
-            <a:ext cx="228600" cy="182880"/>
-          </a:xfrm>
-          <a:prstGeom prst="rightArrow">
-            <a:avLst/>
-          </a:prstGeom>
-          <a:solidFill>
-            <a:srgbClr val="6B7280"/>
+            <a:srgbClr val="8E44AD"/>
           </a:solidFill>
           <a:ln>
             <a:noFill/>
@@ -4339,94 +4170,74 @@
           </a:fontRef>
         </p:style>
         <p:txBody>
-          <a:bodyPr rtlCol="0" anchor="ctr"/>
-          <a:lstStyle/>
-          <a:p>
-            <a:pPr algn="ctr"/>
-          </a:p>
-        </p:txBody>
-      </p:sp>
-      <p:sp>
-        <p:nvSpPr>
-          <p:cNvPr id="25" name="Rounded Rectangle 24"/>
+          <a:bodyPr rtlCol="0" anchor="ctr" wrap="square"/>
+          <a:lstStyle/>
+          <a:p>
+            <a:pPr algn="l">
+              <a:defRPr sz="1000" b="1">
+                <a:solidFill>
+                  <a:srgbClr val="FFFFFF"/>
+                </a:solidFill>
+              </a:defRPr>
+            </a:pPr>
+            <a:r>
+              <a:t>12</a:t>
+            </a:r>
+          </a:p>
+          <a:p>
+            <a:pPr algn="ctr">
+              <a:defRPr sz="1100" b="1">
+                <a:solidFill>
+                  <a:srgbClr val="FFFFFF"/>
+                </a:solidFill>
+              </a:defRPr>
+            </a:pPr>
+            <a:r>
+              <a:t>Respostas COPSOQ</a:t>
+            </a:r>
+          </a:p>
+          <a:p>
+            <a:pPr algn="ctr">
+              <a:defRPr sz="800">
+                <a:solidFill>
+                  <a:srgbClr val="FFFFFF"/>
+                </a:solidFill>
+              </a:defRPr>
+            </a:pPr>
+            <a:r>
+              <a:t>Colaboradores</a:t>
+            </a:r>
+          </a:p>
+          <a:p>
+            <a:pPr algn="ctr">
+              <a:defRPr sz="800">
+                <a:solidFill>
+                  <a:srgbClr val="FFFFFF"/>
+                </a:solidFill>
+              </a:defRPr>
+            </a:pPr>
+            <a:r>
+              <a:t>respondem (7 dias)</a:t>
+            </a:r>
+          </a:p>
+        </p:txBody>
+      </p:sp>
+      <p:sp>
+        <p:nvSpPr>
+          <p:cNvPr id="16" name="Rounded Rectangle 15"/>
           <p:cNvSpPr/>
           <p:nvPr/>
         </p:nvSpPr>
         <p:spPr>
           <a:xfrm>
-            <a:off x="2514600" y="3474720"/>
-            <a:ext cx="2011680" cy="777240"/>
+            <a:off x="274320" y="4206240"/>
+            <a:ext cx="1691640" cy="1280160"/>
           </a:xfrm>
           <a:prstGeom prst="roundRect">
             <a:avLst/>
           </a:prstGeom>
           <a:solidFill>
-            <a:srgbClr val="FFFBEB"/>
-          </a:solidFill>
-          <a:ln w="25400">
-            <a:solidFill>
-              <a:srgbClr val="D97706"/>
-            </a:solidFill>
-          </a:ln>
-        </p:spPr>
-        <p:style>
-          <a:lnRef idx="1">
-            <a:schemeClr val="accent1"/>
-          </a:lnRef>
-          <a:fillRef idx="3">
-            <a:schemeClr val="accent1"/>
-          </a:fillRef>
-          <a:effectRef idx="2">
-            <a:schemeClr val="accent1"/>
-          </a:effectRef>
-          <a:fontRef idx="minor">
-            <a:schemeClr val="lt1"/>
-          </a:fontRef>
-        </p:style>
-        <p:txBody>
-          <a:bodyPr rtlCol="0" anchor="ctr" wrap="square"/>
-          <a:lstStyle/>
-          <a:p>
-            <a:pPr algn="l"/>
-            <a:r>
-              <a:rPr sz="1000" b="1">
-                <a:solidFill>
-                  <a:srgbClr val="1F2937"/>
-                </a:solidFill>
-              </a:rPr>
-              <a:t>12. Gerar Relatorio</a:t>
-            </a:r>
-          </a:p>
-          <a:p>
-            <a:pPr algn="l"/>
-            <a:r>
-              <a:rPr sz="700">
-                <a:solidFill>
-                  <a:srgbClr val="6B7280"/>
-                </a:solidFill>
-              </a:rPr>
-              <a:t>Analise automatica
-dos resultados</a:t>
-            </a:r>
-          </a:p>
-        </p:txBody>
-      </p:sp>
-      <p:sp>
-        <p:nvSpPr>
-          <p:cNvPr id="26" name="Right Arrow 25"/>
-          <p:cNvSpPr/>
-          <p:nvPr/>
-        </p:nvSpPr>
-        <p:spPr>
-          <a:xfrm>
-            <a:off x="4526280" y="3771900"/>
-            <a:ext cx="228600" cy="182880"/>
-          </a:xfrm>
-          <a:prstGeom prst="rightArrow">
-            <a:avLst/>
-          </a:prstGeom>
-          <a:solidFill>
-            <a:srgbClr val="6B7280"/>
+            <a:srgbClr val="8E44AD"/>
           </a:solidFill>
           <a:ln>
             <a:noFill/>
@@ -4447,94 +4258,74 @@
           </a:fontRef>
         </p:style>
         <p:txBody>
-          <a:bodyPr rtlCol="0" anchor="ctr"/>
-          <a:lstStyle/>
-          <a:p>
-            <a:pPr algn="ctr"/>
-          </a:p>
-        </p:txBody>
-      </p:sp>
-      <p:sp>
-        <p:nvSpPr>
-          <p:cNvPr id="27" name="Rounded Rectangle 26"/>
+          <a:bodyPr rtlCol="0" anchor="ctr" wrap="square"/>
+          <a:lstStyle/>
+          <a:p>
+            <a:pPr algn="l">
+              <a:defRPr sz="1000" b="1">
+                <a:solidFill>
+                  <a:srgbClr val="FFFFFF"/>
+                </a:solidFill>
+              </a:defRPr>
+            </a:pPr>
+            <a:r>
+              <a:t>13</a:t>
+            </a:r>
+          </a:p>
+          <a:p>
+            <a:pPr algn="ctr">
+              <a:defRPr sz="1100" b="1">
+                <a:solidFill>
+                  <a:srgbClr val="FFFFFF"/>
+                </a:solidFill>
+              </a:defRPr>
+            </a:pPr>
+            <a:r>
+              <a:t>Gerar Relatorio</a:t>
+            </a:r>
+          </a:p>
+          <a:p>
+            <a:pPr algn="ctr">
+              <a:defRPr sz="800">
+                <a:solidFill>
+                  <a:srgbClr val="FFFFFF"/>
+                </a:solidFill>
+              </a:defRPr>
+            </a:pPr>
+            <a:r>
+              <a:t>Analise automatica</a:t>
+            </a:r>
+          </a:p>
+          <a:p>
+            <a:pPr algn="ctr">
+              <a:defRPr sz="800">
+                <a:solidFill>
+                  <a:srgbClr val="FFFFFF"/>
+                </a:solidFill>
+              </a:defRPr>
+            </a:pPr>
+            <a:r>
+              <a:t>resultados COPSOQ</a:t>
+            </a:r>
+          </a:p>
+        </p:txBody>
+      </p:sp>
+      <p:sp>
+        <p:nvSpPr>
+          <p:cNvPr id="17" name="Rounded Rectangle 16"/>
           <p:cNvSpPr/>
           <p:nvPr/>
         </p:nvSpPr>
         <p:spPr>
           <a:xfrm>
-            <a:off x="4754880" y="3474720"/>
-            <a:ext cx="2011680" cy="777240"/>
+            <a:off x="2148840" y="4206240"/>
+            <a:ext cx="1691640" cy="1280160"/>
           </a:xfrm>
           <a:prstGeom prst="roundRect">
             <a:avLst/>
           </a:prstGeom>
           <a:solidFill>
-            <a:srgbClr val="FFFBEB"/>
-          </a:solidFill>
-          <a:ln w="25400">
-            <a:solidFill>
-              <a:srgbClr val="D97706"/>
-            </a:solidFill>
-          </a:ln>
-        </p:spPr>
-        <p:style>
-          <a:lnRef idx="1">
-            <a:schemeClr val="accent1"/>
-          </a:lnRef>
-          <a:fillRef idx="3">
-            <a:schemeClr val="accent1"/>
-          </a:fillRef>
-          <a:effectRef idx="2">
-            <a:schemeClr val="accent1"/>
-          </a:effectRef>
-          <a:fontRef idx="minor">
-            <a:schemeClr val="lt1"/>
-          </a:fontRef>
-        </p:style>
-        <p:txBody>
-          <a:bodyPr rtlCol="0" anchor="ctr" wrap="square"/>
-          <a:lstStyle/>
-          <a:p>
-            <a:pPr algn="l"/>
-            <a:r>
-              <a:rPr sz="1000" b="1">
-                <a:solidFill>
-                  <a:srgbClr val="1F2937"/>
-                </a:solidFill>
-              </a:rPr>
-              <a:t>13. Inventario Riscos</a:t>
-            </a:r>
-          </a:p>
-          <a:p>
-            <a:pPr algn="l"/>
-            <a:r>
-              <a:rPr sz="700">
-                <a:solidFill>
-                  <a:srgbClr val="6B7280"/>
-                </a:solidFill>
-              </a:rPr>
-              <a:t>Mapeamento completo
-de riscos psicossociais</a:t>
-            </a:r>
-          </a:p>
-        </p:txBody>
-      </p:sp>
-      <p:sp>
-        <p:nvSpPr>
-          <p:cNvPr id="28" name="Right Arrow 27"/>
-          <p:cNvSpPr/>
-          <p:nvPr/>
-        </p:nvSpPr>
-        <p:spPr>
-          <a:xfrm>
-            <a:off x="6766560" y="3771900"/>
-            <a:ext cx="228600" cy="182880"/>
-          </a:xfrm>
-          <a:prstGeom prst="rightArrow">
-            <a:avLst/>
-          </a:prstGeom>
-          <a:solidFill>
-            <a:srgbClr val="6B7280"/>
+            <a:srgbClr val="2C3E50"/>
           </a:solidFill>
           <a:ln>
             <a:noFill/>
@@ -4555,94 +4346,74 @@
           </a:fontRef>
         </p:style>
         <p:txBody>
-          <a:bodyPr rtlCol="0" anchor="ctr"/>
-          <a:lstStyle/>
-          <a:p>
-            <a:pPr algn="ctr"/>
-          </a:p>
-        </p:txBody>
-      </p:sp>
-      <p:sp>
-        <p:nvSpPr>
-          <p:cNvPr id="29" name="Rounded Rectangle 28"/>
+          <a:bodyPr rtlCol="0" anchor="ctr" wrap="square"/>
+          <a:lstStyle/>
+          <a:p>
+            <a:pPr algn="l">
+              <a:defRPr sz="1000" b="1">
+                <a:solidFill>
+                  <a:srgbClr val="FFFFFF"/>
+                </a:solidFill>
+              </a:defRPr>
+            </a:pPr>
+            <a:r>
+              <a:t>14</a:t>
+            </a:r>
+          </a:p>
+          <a:p>
+            <a:pPr algn="ctr">
+              <a:defRPr sz="1100" b="1">
+                <a:solidFill>
+                  <a:srgbClr val="FFFFFF"/>
+                </a:solidFill>
+              </a:defRPr>
+            </a:pPr>
+            <a:r>
+              <a:t>Inventario Riscos</a:t>
+            </a:r>
+          </a:p>
+          <a:p>
+            <a:pPr algn="ctr">
+              <a:defRPr sz="800">
+                <a:solidFill>
+                  <a:srgbClr val="FFFFFF"/>
+                </a:solidFill>
+              </a:defRPr>
+            </a:pPr>
+            <a:r>
+              <a:t>Mapeamento riscos</a:t>
+            </a:r>
+          </a:p>
+          <a:p>
+            <a:pPr algn="ctr">
+              <a:defRPr sz="800">
+                <a:solidFill>
+                  <a:srgbClr val="FFFFFF"/>
+                </a:solidFill>
+              </a:defRPr>
+            </a:pPr>
+            <a:r>
+              <a:t>psicossociais</a:t>
+            </a:r>
+          </a:p>
+        </p:txBody>
+      </p:sp>
+      <p:sp>
+        <p:nvSpPr>
+          <p:cNvPr id="18" name="Rounded Rectangle 17"/>
           <p:cNvSpPr/>
           <p:nvPr/>
         </p:nvSpPr>
         <p:spPr>
           <a:xfrm>
-            <a:off x="6995160" y="3474720"/>
-            <a:ext cx="2011680" cy="777240"/>
+            <a:off x="4023360" y="4206240"/>
+            <a:ext cx="1691640" cy="1280160"/>
           </a:xfrm>
           <a:prstGeom prst="roundRect">
             <a:avLst/>
           </a:prstGeom>
           <a:solidFill>
-            <a:srgbClr val="FFFBEB"/>
-          </a:solidFill>
-          <a:ln w="25400">
-            <a:solidFill>
-              <a:srgbClr val="D97706"/>
-            </a:solidFill>
-          </a:ln>
-        </p:spPr>
-        <p:style>
-          <a:lnRef idx="1">
-            <a:schemeClr val="accent1"/>
-          </a:lnRef>
-          <a:fillRef idx="3">
-            <a:schemeClr val="accent1"/>
-          </a:fillRef>
-          <a:effectRef idx="2">
-            <a:schemeClr val="accent1"/>
-          </a:effectRef>
-          <a:fontRef idx="minor">
-            <a:schemeClr val="lt1"/>
-          </a:fontRef>
-        </p:style>
-        <p:txBody>
-          <a:bodyPr rtlCol="0" anchor="ctr" wrap="square"/>
-          <a:lstStyle/>
-          <a:p>
-            <a:pPr algn="l"/>
-            <a:r>
-              <a:rPr sz="1000" b="1">
-                <a:solidFill>
-                  <a:srgbClr val="1F2937"/>
-                </a:solidFill>
-              </a:rPr>
-              <a:t>14. Plano de Acao</a:t>
-            </a:r>
-          </a:p>
-          <a:p>
-            <a:pPr algn="l"/>
-            <a:r>
-              <a:rPr sz="700">
-                <a:solidFill>
-                  <a:srgbClr val="6B7280"/>
-                </a:solidFill>
-              </a:rPr>
-              <a:t>Acoes corretivas com
-prazos e responsaveis</a:t>
-            </a:r>
-          </a:p>
-        </p:txBody>
-      </p:sp>
-      <p:sp>
-        <p:nvSpPr>
-          <p:cNvPr id="30" name="Right Arrow 29"/>
-          <p:cNvSpPr/>
-          <p:nvPr/>
-        </p:nvSpPr>
-        <p:spPr>
-          <a:xfrm>
-            <a:off x="9006840" y="3771900"/>
-            <a:ext cx="228600" cy="182880"/>
-          </a:xfrm>
-          <a:prstGeom prst="rightArrow">
-            <a:avLst/>
-          </a:prstGeom>
-          <a:solidFill>
-            <a:srgbClr val="6B7280"/>
+            <a:srgbClr val="2C3E50"/>
           </a:solidFill>
           <a:ln>
             <a:noFill/>
@@ -4663,94 +4434,74 @@
           </a:fontRef>
         </p:style>
         <p:txBody>
-          <a:bodyPr rtlCol="0" anchor="ctr"/>
-          <a:lstStyle/>
-          <a:p>
-            <a:pPr algn="ctr"/>
-          </a:p>
-        </p:txBody>
-      </p:sp>
-      <p:sp>
-        <p:nvSpPr>
-          <p:cNvPr id="31" name="Rounded Rectangle 30"/>
+          <a:bodyPr rtlCol="0" anchor="ctr" wrap="square"/>
+          <a:lstStyle/>
+          <a:p>
+            <a:pPr algn="l">
+              <a:defRPr sz="1000" b="1">
+                <a:solidFill>
+                  <a:srgbClr val="FFFFFF"/>
+                </a:solidFill>
+              </a:defRPr>
+            </a:pPr>
+            <a:r>
+              <a:t>15</a:t>
+            </a:r>
+          </a:p>
+          <a:p>
+            <a:pPr algn="ctr">
+              <a:defRPr sz="1100" b="1">
+                <a:solidFill>
+                  <a:srgbClr val="FFFFFF"/>
+                </a:solidFill>
+              </a:defRPr>
+            </a:pPr>
+            <a:r>
+              <a:t>Plano de Acao</a:t>
+            </a:r>
+          </a:p>
+          <a:p>
+            <a:pPr algn="ctr">
+              <a:defRPr sz="800">
+                <a:solidFill>
+                  <a:srgbClr val="FFFFFF"/>
+                </a:solidFill>
+              </a:defRPr>
+            </a:pPr>
+            <a:r>
+              <a:t>Acoes corretivas</a:t>
+            </a:r>
+          </a:p>
+          <a:p>
+            <a:pPr algn="ctr">
+              <a:defRPr sz="800">
+                <a:solidFill>
+                  <a:srgbClr val="FFFFFF"/>
+                </a:solidFill>
+              </a:defRPr>
+            </a:pPr>
+            <a:r>
+              <a:t>prazos/responsaveis</a:t>
+            </a:r>
+          </a:p>
+        </p:txBody>
+      </p:sp>
+      <p:sp>
+        <p:nvSpPr>
+          <p:cNvPr id="19" name="Rounded Rectangle 18"/>
           <p:cNvSpPr/>
           <p:nvPr/>
         </p:nvSpPr>
         <p:spPr>
           <a:xfrm>
-            <a:off x="9235440" y="3474720"/>
-            <a:ext cx="2011680" cy="777240"/>
+            <a:off x="5897880" y="4206240"/>
+            <a:ext cx="1691640" cy="1280160"/>
           </a:xfrm>
           <a:prstGeom prst="roundRect">
             <a:avLst/>
           </a:prstGeom>
           <a:solidFill>
-            <a:srgbClr val="DCFCE7"/>
-          </a:solidFill>
-          <a:ln w="25400">
-            <a:solidFill>
-              <a:srgbClr val="16A34A"/>
-            </a:solidFill>
-          </a:ln>
-        </p:spPr>
-        <p:style>
-          <a:lnRef idx="1">
-            <a:schemeClr val="accent1"/>
-          </a:lnRef>
-          <a:fillRef idx="3">
-            <a:schemeClr val="accent1"/>
-          </a:fillRef>
-          <a:effectRef idx="2">
-            <a:schemeClr val="accent1"/>
-          </a:effectRef>
-          <a:fontRef idx="minor">
-            <a:schemeClr val="lt1"/>
-          </a:fontRef>
-        </p:style>
-        <p:txBody>
-          <a:bodyPr rtlCol="0" anchor="ctr" wrap="square"/>
-          <a:lstStyle/>
-          <a:p>
-            <a:pPr algn="l"/>
-            <a:r>
-              <a:rPr sz="1000" b="1">
-                <a:solidFill>
-                  <a:srgbClr val="1F2937"/>
-                </a:solidFill>
-              </a:rPr>
-              <a:t>15. Proposta Final</a:t>
-            </a:r>
-          </a:p>
-          <a:p>
-            <a:pPr algn="l"/>
-            <a:r>
-              <a:rPr sz="700">
-                <a:solidFill>
-                  <a:srgbClr val="6B7280"/>
-                </a:solidFill>
-              </a:rPr>
-              <a:t>Proposta definitiva com
-valores reais do servico</a:t>
-            </a:r>
-          </a:p>
-        </p:txBody>
-      </p:sp>
-      <p:sp>
-        <p:nvSpPr>
-          <p:cNvPr id="32" name="Down Arrow 31"/>
-          <p:cNvSpPr/>
-          <p:nvPr/>
-        </p:nvSpPr>
-        <p:spPr>
-          <a:xfrm>
-            <a:off x="10149840" y="4251960"/>
-            <a:ext cx="182880" cy="137160"/>
-          </a:xfrm>
-          <a:prstGeom prst="downArrow">
-            <a:avLst/>
-          </a:prstGeom>
-          <a:solidFill>
-            <a:srgbClr val="6B7280"/>
+            <a:srgbClr val="4A90D9"/>
           </a:solidFill>
           <a:ln>
             <a:noFill/>
@@ -4771,288 +4522,74 @@
           </a:fontRef>
         </p:style>
         <p:txBody>
-          <a:bodyPr rtlCol="0" anchor="ctr"/>
-          <a:lstStyle/>
-          <a:p>
-            <a:pPr algn="ctr"/>
-          </a:p>
-        </p:txBody>
-      </p:sp>
-      <p:sp>
-        <p:nvSpPr>
-          <p:cNvPr id="33" name="Rounded Rectangle 32"/>
+          <a:bodyPr rtlCol="0" anchor="ctr" wrap="square"/>
+          <a:lstStyle/>
+          <a:p>
+            <a:pPr algn="l">
+              <a:defRPr sz="1000" b="1">
+                <a:solidFill>
+                  <a:srgbClr val="FFFFFF"/>
+                </a:solidFill>
+              </a:defRPr>
+            </a:pPr>
+            <a:r>
+              <a:t>16</a:t>
+            </a:r>
+          </a:p>
+          <a:p>
+            <a:pPr algn="ctr">
+              <a:defRPr sz="1100" b="1">
+                <a:solidFill>
+                  <a:srgbClr val="FFFFFF"/>
+                </a:solidFill>
+              </a:defRPr>
+            </a:pPr>
+            <a:r>
+              <a:t>Proposta Final</a:t>
+            </a:r>
+          </a:p>
+          <a:p>
+            <a:pPr algn="ctr">
+              <a:defRPr sz="800">
+                <a:solidFill>
+                  <a:srgbClr val="FFFFFF"/>
+                </a:solidFill>
+              </a:defRPr>
+            </a:pPr>
+            <a:r>
+              <a:t>Proposta definitiva</a:t>
+            </a:r>
+          </a:p>
+          <a:p>
+            <a:pPr algn="ctr">
+              <a:defRPr sz="800">
+                <a:solidFill>
+                  <a:srgbClr val="FFFFFF"/>
+                </a:solidFill>
+              </a:defRPr>
+            </a:pPr>
+            <a:r>
+              <a:t>valores reais</a:t>
+            </a:r>
+          </a:p>
+        </p:txBody>
+      </p:sp>
+      <p:sp>
+        <p:nvSpPr>
+          <p:cNvPr id="20" name="Rounded Rectangle 19"/>
           <p:cNvSpPr/>
           <p:nvPr/>
         </p:nvSpPr>
         <p:spPr>
           <a:xfrm>
-            <a:off x="9235440" y="4389120"/>
-            <a:ext cx="2011680" cy="777240"/>
+            <a:off x="7772400" y="4206240"/>
+            <a:ext cx="1691640" cy="1280160"/>
           </a:xfrm>
           <a:prstGeom prst="roundRect">
             <a:avLst/>
           </a:prstGeom>
           <a:solidFill>
-            <a:srgbClr val="DBEAFE"/>
-          </a:solidFill>
-          <a:ln w="25400">
-            <a:solidFill>
-              <a:srgbClr val="1E40AF"/>
-            </a:solidFill>
-          </a:ln>
-        </p:spPr>
-        <p:style>
-          <a:lnRef idx="1">
-            <a:schemeClr val="accent1"/>
-          </a:lnRef>
-          <a:fillRef idx="3">
-            <a:schemeClr val="accent1"/>
-          </a:fillRef>
-          <a:effectRef idx="2">
-            <a:schemeClr val="accent1"/>
-          </a:effectRef>
-          <a:fontRef idx="minor">
-            <a:schemeClr val="lt1"/>
-          </a:fontRef>
-        </p:style>
-        <p:txBody>
-          <a:bodyPr rtlCol="0" anchor="ctr" wrap="square"/>
-          <a:lstStyle/>
-          <a:p>
-            <a:pPr algn="l"/>
-            <a:r>
-              <a:rPr sz="1000" b="1">
-                <a:solidFill>
-                  <a:srgbClr val="1F2937"/>
-                </a:solidFill>
-              </a:rPr>
-              <a:t>18. Entrega Final</a:t>
-            </a:r>
-          </a:p>
-          <a:p>
-            <a:pPr algn="l"/>
-            <a:r>
-              <a:rPr sz="700">
-                <a:solidFill>
-                  <a:srgbClr val="6B7280"/>
-                </a:solidFill>
-              </a:rPr>
-              <a:t>7 PDFs entregues:
-Proposta, COPSOQ, etc.</a:t>
-            </a:r>
-          </a:p>
-        </p:txBody>
-      </p:sp>
-      <p:sp>
-        <p:nvSpPr>
-          <p:cNvPr id="34" name="Rounded Rectangle 33"/>
-          <p:cNvSpPr/>
-          <p:nvPr/>
-        </p:nvSpPr>
-        <p:spPr>
-          <a:xfrm>
-            <a:off x="6995160" y="4389120"/>
-            <a:ext cx="2011680" cy="777240"/>
-          </a:xfrm>
-          <a:prstGeom prst="roundRect">
-            <a:avLst/>
-          </a:prstGeom>
-          <a:solidFill>
-            <a:srgbClr val="DBEAFE"/>
-          </a:solidFill>
-          <a:ln w="25400">
-            <a:solidFill>
-              <a:srgbClr val="1E40AF"/>
-            </a:solidFill>
-          </a:ln>
-        </p:spPr>
-        <p:style>
-          <a:lnRef idx="1">
-            <a:schemeClr val="accent1"/>
-          </a:lnRef>
-          <a:fillRef idx="3">
-            <a:schemeClr val="accent1"/>
-          </a:fillRef>
-          <a:effectRef idx="2">
-            <a:schemeClr val="accent1"/>
-          </a:effectRef>
-          <a:fontRef idx="minor">
-            <a:schemeClr val="lt1"/>
-          </a:fontRef>
-        </p:style>
-        <p:txBody>
-          <a:bodyPr rtlCol="0" anchor="ctr" wrap="square"/>
-          <a:lstStyle/>
-          <a:p>
-            <a:pPr algn="l"/>
-            <a:r>
-              <a:rPr sz="1000" b="1">
-                <a:solidFill>
-                  <a:srgbClr val="1F2937"/>
-                </a:solidFill>
-              </a:rPr>
-              <a:t>17. Liberar PDFs</a:t>
-            </a:r>
-          </a:p>
-          <a:p>
-            <a:pPr algn="l"/>
-            <a:r>
-              <a:rPr sz="700">
-                <a:solidFill>
-                  <a:srgbClr val="6B7280"/>
-                </a:solidFill>
-              </a:rPr>
-              <a:t>Todos os documentos
-liberados para download</a:t>
-            </a:r>
-          </a:p>
-        </p:txBody>
-      </p:sp>
-      <p:sp>
-        <p:nvSpPr>
-          <p:cNvPr id="35" name="Rounded Rectangle 34"/>
-          <p:cNvSpPr/>
-          <p:nvPr/>
-        </p:nvSpPr>
-        <p:spPr>
-          <a:xfrm>
-            <a:off x="4754880" y="4389120"/>
-            <a:ext cx="2011680" cy="777240"/>
-          </a:xfrm>
-          <a:prstGeom prst="roundRect">
-            <a:avLst/>
-          </a:prstGeom>
-          <a:solidFill>
-            <a:srgbClr val="DCFCE7"/>
-          </a:solidFill>
-          <a:ln w="25400">
-            <a:solidFill>
-              <a:srgbClr val="16A34A"/>
-            </a:solidFill>
-          </a:ln>
-        </p:spPr>
-        <p:style>
-          <a:lnRef idx="1">
-            <a:schemeClr val="accent1"/>
-          </a:lnRef>
-          <a:fillRef idx="3">
-            <a:schemeClr val="accent1"/>
-          </a:fillRef>
-          <a:effectRef idx="2">
-            <a:schemeClr val="accent1"/>
-          </a:effectRef>
-          <a:fontRef idx="minor">
-            <a:schemeClr val="lt1"/>
-          </a:fontRef>
-        </p:style>
-        <p:txBody>
-          <a:bodyPr rtlCol="0" anchor="ctr" wrap="square"/>
-          <a:lstStyle/>
-          <a:p>
-            <a:pPr algn="l"/>
-            <a:r>
-              <a:rPr sz="1000" b="1">
-                <a:solidFill>
-                  <a:srgbClr val="1F2937"/>
-                </a:solidFill>
-              </a:rPr>
-              <a:t>16. Aprovar + Pagar</a:t>
-            </a:r>
-          </a:p>
-          <a:p>
-            <a:pPr algn="l"/>
-            <a:r>
-              <a:rPr sz="700">
-                <a:solidFill>
-                  <a:srgbClr val="6B7280"/>
-                </a:solidFill>
-              </a:rPr>
-              <a:t>Empresa aprova proposta
-final e paga parcelas</a:t>
-            </a:r>
-          </a:p>
-        </p:txBody>
-      </p:sp>
-      <p:sp>
-        <p:nvSpPr>
-          <p:cNvPr id="36" name="Rounded Rectangle 35"/>
-          <p:cNvSpPr/>
-          <p:nvPr/>
-        </p:nvSpPr>
-        <p:spPr>
-          <a:xfrm>
-            <a:off x="274320" y="5349240"/>
-            <a:ext cx="11640312" cy="731520"/>
-          </a:xfrm>
-          <a:prstGeom prst="roundRect">
-            <a:avLst/>
-          </a:prstGeom>
-          <a:solidFill>
-            <a:srgbClr val="F3F4F6"/>
-          </a:solidFill>
-          <a:ln w="12700">
-            <a:solidFill>
-              <a:srgbClr val="6B7280"/>
-            </a:solidFill>
-          </a:ln>
-        </p:spPr>
-        <p:style>
-          <a:lnRef idx="1">
-            <a:schemeClr val="accent1"/>
-          </a:lnRef>
-          <a:fillRef idx="3">
-            <a:schemeClr val="accent1"/>
-          </a:fillRef>
-          <a:effectRef idx="2">
-            <a:schemeClr val="accent1"/>
-          </a:effectRef>
-          <a:fontRef idx="minor">
-            <a:schemeClr val="lt1"/>
-          </a:fontRef>
-        </p:style>
-        <p:txBody>
-          <a:bodyPr rtlCol="0" anchor="ctr" wrap="square"/>
-          <a:lstStyle/>
-          <a:p>
-            <a:pPr algn="ctr"/>
-            <a:r>
-              <a:rPr sz="1200" b="1">
-                <a:solidFill>
-                  <a:srgbClr val="1F2937"/>
-                </a:solidFill>
-              </a:rPr>
-              <a:t>Documentos Entregues (7 PDFs)</a:t>
-            </a:r>
-          </a:p>
-          <a:p>
-            <a:pPr algn="ctr"/>
-            <a:r>
-              <a:rPr sz="900">
-                <a:solidFill>
-                  <a:srgbClr val="6B7280"/>
-                </a:solidFill>
-              </a:rPr>
-              <a:t>Proposta Comercial | Relatorio COPSOQ-II | Inventario de Riscos | Plano de Acao | Programa de Treinamento | Checklist de Conformidade | Certificado NR-01</a:t>
-            </a:r>
-          </a:p>
-        </p:txBody>
-      </p:sp>
-      <p:sp>
-        <p:nvSpPr>
-          <p:cNvPr id="37" name="Rounded Rectangle 36"/>
-          <p:cNvSpPr/>
-          <p:nvPr/>
-        </p:nvSpPr>
-        <p:spPr>
-          <a:xfrm>
-            <a:off x="274320" y="6217920"/>
-            <a:ext cx="11640312" cy="411480"/>
-          </a:xfrm>
-          <a:prstGeom prst="roundRect">
-            <a:avLst/>
-          </a:prstGeom>
-          <a:solidFill>
-            <a:srgbClr val="FFFFFF"/>
+            <a:srgbClr val="E74C3C"/>
           </a:solidFill>
           <a:ln>
             <a:noFill/>
@@ -5073,71 +4610,208 @@
           </a:fontRef>
         </p:style>
         <p:txBody>
-          <a:bodyPr rtlCol="0" anchor="ctr"/>
-          <a:lstStyle/>
-          <a:p>
-            <a:pPr algn="ctr"/>
-            <a:r>
-              <a:rPr sz="900">
-                <a:solidFill>
-                  <a:srgbClr val="1E40AF"/>
-                </a:solidFill>
-              </a:rPr>
-              <a:t>  ● Consultoria  </a:t>
-            </a:r>
-            <a:r>
-              <a:rPr sz="900">
-                <a:solidFill>
-                  <a:srgbClr val="16A34A"/>
-                </a:solidFill>
-              </a:rPr>
-              <a:t>  ● Aprovacao/Envio  </a:t>
-            </a:r>
-            <a:r>
-              <a:rPr sz="900">
-                <a:solidFill>
-                  <a:srgbClr val="EA580C"/>
-                </a:solidFill>
-              </a:rPr>
-              <a:t>  ● Proposta  </a:t>
-            </a:r>
-            <a:r>
-              <a:rPr sz="900">
-                <a:solidFill>
-                  <a:srgbClr val="7C3AED"/>
-                </a:solidFill>
-              </a:rPr>
-              <a:t>  ● Empresa  </a:t>
-            </a:r>
-            <a:r>
-              <a:rPr sz="900">
-                <a:solidFill>
-                  <a:srgbClr val="DC2626"/>
-                </a:solidFill>
-              </a:rPr>
-              <a:t>  ● COPSOQ-II  </a:t>
-            </a:r>
-            <a:r>
-              <a:rPr sz="900">
-                <a:solidFill>
-                  <a:srgbClr val="D97706"/>
-                </a:solidFill>
-              </a:rPr>
-              <a:t>  ● Analise NR-01  </a:t>
-            </a:r>
-          </a:p>
-        </p:txBody>
-      </p:sp>
-      <p:sp>
-        <p:nvSpPr>
-          <p:cNvPr id="38" name="TextBox 37"/>
+          <a:bodyPr rtlCol="0" anchor="ctr" wrap="square"/>
+          <a:lstStyle/>
+          <a:p>
+            <a:pPr algn="l">
+              <a:defRPr sz="1000" b="1">
+                <a:solidFill>
+                  <a:srgbClr val="FFFFFF"/>
+                </a:solidFill>
+              </a:defRPr>
+            </a:pPr>
+            <a:r>
+              <a:t>17</a:t>
+            </a:r>
+          </a:p>
+          <a:p>
+            <a:pPr algn="ctr">
+              <a:defRPr sz="1100" b="1">
+                <a:solidFill>
+                  <a:srgbClr val="FFFFFF"/>
+                </a:solidFill>
+              </a:defRPr>
+            </a:pPr>
+            <a:r>
+              <a:t>Aprovar + Pagar</a:t>
+            </a:r>
+          </a:p>
+          <a:p>
+            <a:pPr algn="ctr">
+              <a:defRPr sz="800">
+                <a:solidFill>
+                  <a:srgbClr val="FFFFFF"/>
+                </a:solidFill>
+              </a:defRPr>
+            </a:pPr>
+            <a:r>
+              <a:t>Aprovacao + parcelas</a:t>
+            </a:r>
+          </a:p>
+          <a:p>
+            <a:pPr algn="ctr">
+              <a:defRPr sz="800">
+                <a:solidFill>
+                  <a:srgbClr val="FFFFFF"/>
+                </a:solidFill>
+              </a:defRPr>
+            </a:pPr>
+            <a:r>
+              <a:t>40/30/30</a:t>
+            </a:r>
+          </a:p>
+        </p:txBody>
+      </p:sp>
+      <p:sp>
+        <p:nvSpPr>
+          <p:cNvPr id="21" name="Rounded Rectangle 20"/>
+          <p:cNvSpPr/>
+          <p:nvPr/>
+        </p:nvSpPr>
+        <p:spPr>
+          <a:xfrm>
+            <a:off x="9646920" y="4206240"/>
+            <a:ext cx="1691640" cy="1280160"/>
+          </a:xfrm>
+          <a:prstGeom prst="roundRect">
+            <a:avLst/>
+          </a:prstGeom>
+          <a:solidFill>
+            <a:srgbClr val="27AE60"/>
+          </a:solidFill>
+          <a:ln>
+            <a:noFill/>
+          </a:ln>
+        </p:spPr>
+        <p:style>
+          <a:lnRef idx="1">
+            <a:schemeClr val="accent1"/>
+          </a:lnRef>
+          <a:fillRef idx="3">
+            <a:schemeClr val="accent1"/>
+          </a:fillRef>
+          <a:effectRef idx="2">
+            <a:schemeClr val="accent1"/>
+          </a:effectRef>
+          <a:fontRef idx="minor">
+            <a:schemeClr val="lt1"/>
+          </a:fontRef>
+        </p:style>
+        <p:txBody>
+          <a:bodyPr rtlCol="0" anchor="ctr" wrap="square"/>
+          <a:lstStyle/>
+          <a:p>
+            <a:pPr algn="l">
+              <a:defRPr sz="1000" b="1">
+                <a:solidFill>
+                  <a:srgbClr val="FFFFFF"/>
+                </a:solidFill>
+              </a:defRPr>
+            </a:pPr>
+            <a:r>
+              <a:t>18</a:t>
+            </a:r>
+          </a:p>
+          <a:p>
+            <a:pPr algn="ctr">
+              <a:defRPr sz="1100" b="1">
+                <a:solidFill>
+                  <a:srgbClr val="FFFFFF"/>
+                </a:solidFill>
+              </a:defRPr>
+            </a:pPr>
+            <a:r>
+              <a:t>Liberar PDFs</a:t>
+            </a:r>
+          </a:p>
+          <a:p>
+            <a:pPr algn="ctr">
+              <a:defRPr sz="800">
+                <a:solidFill>
+                  <a:srgbClr val="FFFFFF"/>
+                </a:solidFill>
+              </a:defRPr>
+            </a:pPr>
+            <a:r>
+              <a:t>Docs liberados apos</a:t>
+            </a:r>
+          </a:p>
+          <a:p>
+            <a:pPr algn="ctr">
+              <a:defRPr sz="800">
+                <a:solidFill>
+                  <a:srgbClr val="FFFFFF"/>
+                </a:solidFill>
+              </a:defRPr>
+            </a:pPr>
+            <a:r>
+              <a:t>pagamento 100%</a:t>
+            </a:r>
+          </a:p>
+        </p:txBody>
+      </p:sp>
+      <p:sp>
+        <p:nvSpPr>
+          <p:cNvPr id="22" name="Rounded Rectangle 21"/>
+          <p:cNvSpPr/>
+          <p:nvPr/>
+        </p:nvSpPr>
+        <p:spPr>
+          <a:xfrm>
+            <a:off x="274320" y="5669280"/>
+            <a:ext cx="11612880" cy="457200"/>
+          </a:xfrm>
+          <a:prstGeom prst="roundRect">
+            <a:avLst/>
+          </a:prstGeom>
+          <a:solidFill>
+            <a:srgbClr val="27AE60"/>
+          </a:solidFill>
+          <a:ln>
+            <a:noFill/>
+          </a:ln>
+        </p:spPr>
+        <p:style>
+          <a:lnRef idx="1">
+            <a:schemeClr val="accent1"/>
+          </a:lnRef>
+          <a:fillRef idx="3">
+            <a:schemeClr val="accent1"/>
+          </a:fillRef>
+          <a:effectRef idx="2">
+            <a:schemeClr val="accent1"/>
+          </a:effectRef>
+          <a:fontRef idx="minor">
+            <a:schemeClr val="lt1"/>
+          </a:fontRef>
+        </p:style>
+        <p:txBody>
+          <a:bodyPr rtlCol="0" anchor="ctr" wrap="square"/>
+          <a:lstStyle/>
+          <a:p>
+            <a:pPr algn="ctr">
+              <a:defRPr sz="1000" b="1">
+                <a:solidFill>
+                  <a:srgbClr val="FFFFFF"/>
+                </a:solidFill>
+              </a:defRPr>
+            </a:pPr>
+            <a:r>
+              <a:t>Documentos Entregues (7 PDFs): Proposta Comercial | Relatorio COPSOQ-II | Inventario de Riscos | Plano de Acao | Programa de Treinamento | Checklist de Conformidade | Certificado NR-01</a:t>
+            </a:r>
+          </a:p>
+        </p:txBody>
+      </p:sp>
+      <p:sp>
+        <p:nvSpPr>
+          <p:cNvPr id="23" name="TextBox 22"/>
           <p:cNvSpPr txBox="1"/>
           <p:nvPr/>
         </p:nvSpPr>
         <p:spPr>
           <a:xfrm>
-            <a:off x="274320" y="6492240"/>
-            <a:ext cx="11640312" cy="274320"/>
+            <a:off x="274320" y="6263640"/>
+            <a:ext cx="11612880" cy="365760"/>
           </a:xfrm>
           <a:prstGeom prst="rect">
             <a:avLst/>
@@ -5150,13 +4824,14 @@
           </a:bodyPr>
           <a:lstStyle/>
           <a:p>
-            <a:pPr algn="ctr"/>
-            <a:r>
-              <a:rPr sz="800">
-                <a:solidFill>
-                  <a:srgbClr val="6B7280"/>
-                </a:solidFill>
-              </a:rPr>
+            <a:pPr algn="ctr">
+              <a:defRPr sz="900">
+                <a:solidFill>
+                  <a:srgbClr val="666666"/>
+                </a:solidFill>
+              </a:defRPr>
+            </a:pPr>
+            <a:r>
               <a:t>Black Belt Consultoria SST | contato@blackbeltconsultoria.com | blackbeltconsultoria.com</a:t>
             </a:r>
           </a:p>

--- a/docs/Fluxograma_SamurAI_BlackBelt.pptx
+++ b/docs/Fluxograma_SamurAI_BlackBelt.pptx
@@ -7,7 +7,7 @@
   <p:sldIdLst>
     <p:sldId id="256" r:id="rId7"/>
   </p:sldIdLst>
-  <p:sldSz cx="12188952" cy="6858000" type="screen4x3"/>
+  <p:sldSz cx="12188952" cy="8778240" type="screen4x3"/>
   <p:notesSz cx="6858000" cy="9144000"/>
   <p:defaultTextStyle>
     <a:defPPr>
@@ -3868,6 +3868,18 @@
               <a:t>+ credenciais</a:t>
             </a:r>
           </a:p>
+          <a:p>
+            <a:pPr algn="ctr">
+              <a:defRPr sz="700">
+                <a:solidFill>
+                  <a:srgbClr val="FFFF99"/>
+                </a:solidFill>
+              </a:defRPr>
+            </a:pPr>
+            <a:r>
+              <a:t>✉ envia login e senha</a:t>
+            </a:r>
+          </a:p>
         </p:txBody>
       </p:sp>
       <p:sp>
@@ -4494,7 +4506,7 @@
         </p:nvSpPr>
         <p:spPr>
           <a:xfrm>
-            <a:off x="5897880" y="4206240"/>
+            <a:off x="9646920" y="5852160"/>
             <a:ext cx="1691640" cy="1280160"/>
           </a:xfrm>
           <a:prstGeom prst="roundRect">
@@ -4533,7 +4545,7 @@
               </a:defRPr>
             </a:pPr>
             <a:r>
-              <a:t>16</a:t>
+              <a:t>18</a:t>
             </a:r>
           </a:p>
           <a:p>
@@ -4582,7 +4594,7 @@
         </p:nvSpPr>
         <p:spPr>
           <a:xfrm>
-            <a:off x="7772400" y="4206240"/>
+            <a:off x="7772400" y="5852160"/>
             <a:ext cx="1691640" cy="1280160"/>
           </a:xfrm>
           <a:prstGeom prst="roundRect">
@@ -4621,7 +4633,7 @@
               </a:defRPr>
             </a:pPr>
             <a:r>
-              <a:t>17</a:t>
+              <a:t>19</a:t>
             </a:r>
           </a:p>
           <a:p>
@@ -4670,7 +4682,7 @@
         </p:nvSpPr>
         <p:spPr>
           <a:xfrm>
-            <a:off x="9646920" y="4206240"/>
+            <a:off x="5897880" y="5852160"/>
             <a:ext cx="1691640" cy="1280160"/>
           </a:xfrm>
           <a:prstGeom prst="roundRect">
@@ -4709,7 +4721,7 @@
               </a:defRPr>
             </a:pPr>
             <a:r>
-              <a:t>18</a:t>
+              <a:t>20</a:t>
             </a:r>
           </a:p>
           <a:p>
@@ -4746,6 +4758,182 @@
             </a:pPr>
             <a:r>
               <a:t>pagamento 100%</a:t>
+            </a:r>
+          </a:p>
+        </p:txBody>
+      </p:sp>
+      <p:sp>
+        <p:nvSpPr>
+          <p:cNvPr id="30" name="Rounded Rectangle 29"/>
+          <p:cNvSpPr/>
+          <p:nvPr/>
+        </p:nvSpPr>
+        <p:spPr>
+          <a:xfrm>
+            <a:off x="5897880" y="4206240"/>
+            <a:ext cx="1691640" cy="1280160"/>
+          </a:xfrm>
+          <a:prstGeom prst="roundRect">
+            <a:avLst/>
+          </a:prstGeom>
+          <a:solidFill>
+            <a:srgbClr val="1ABC9C"/>
+          </a:solidFill>
+          <a:ln>
+            <a:noFill/>
+          </a:ln>
+        </p:spPr>
+        <p:style>
+          <a:lnRef idx="1">
+            <a:schemeClr val="accent1"/>
+          </a:lnRef>
+          <a:fillRef idx="3">
+            <a:schemeClr val="accent1"/>
+          </a:fillRef>
+          <a:effectRef idx="2">
+            <a:schemeClr val="accent1"/>
+          </a:effectRef>
+          <a:fontRef idx="minor">
+            <a:schemeClr val="lt1"/>
+          </a:fontRef>
+        </p:style>
+        <p:txBody>
+          <a:bodyPr rtlCol="0" anchor="ctr" wrap="square"/>
+          <a:lstStyle/>
+          <a:p>
+            <a:pPr algn="l">
+              <a:defRPr sz="1000" b="1">
+                <a:solidFill>
+                  <a:srgbClr val="FFFFFF"/>
+                </a:solidFill>
+              </a:defRPr>
+            </a:pPr>
+            <a:r>
+              <a:t>16</a:t>
+            </a:r>
+          </a:p>
+          <a:p>
+            <a:pPr algn="ctr">
+              <a:defRPr sz="1100" b="1">
+                <a:solidFill>
+                  <a:srgbClr val="FFFFFF"/>
+                </a:solidFill>
+              </a:defRPr>
+            </a:pPr>
+            <a:r>
+              <a:t>Programa Treinamento</a:t>
+            </a:r>
+          </a:p>
+          <a:p>
+            <a:pPr algn="ctr">
+              <a:defRPr sz="800">
+                <a:solidFill>
+                  <a:srgbClr val="FFFFFF"/>
+                </a:solidFill>
+              </a:defRPr>
+            </a:pPr>
+            <a:r>
+              <a:t>8h, 6 modulos</a:t>
+            </a:r>
+          </a:p>
+          <a:p>
+            <a:pPr algn="ctr">
+              <a:defRPr sz="800">
+                <a:solidFill>
+                  <a:srgbClr val="FFFFFF"/>
+                </a:solidFill>
+              </a:defRPr>
+            </a:pPr>
+            <a:r>
+              <a:t>(novo)</a:t>
+            </a:r>
+          </a:p>
+        </p:txBody>
+      </p:sp>
+      <p:sp>
+        <p:nvSpPr>
+          <p:cNvPr id="31" name="Rounded Rectangle 30"/>
+          <p:cNvSpPr/>
+          <p:nvPr/>
+        </p:nvSpPr>
+        <p:spPr>
+          <a:xfrm>
+            <a:off x="7772400" y="4206240"/>
+            <a:ext cx="1691640" cy="1280160"/>
+          </a:xfrm>
+          <a:prstGeom prst="roundRect">
+            <a:avLst/>
+          </a:prstGeom>
+          <a:solidFill>
+            <a:srgbClr val="9B59B6"/>
+          </a:solidFill>
+          <a:ln>
+            <a:noFill/>
+          </a:ln>
+        </p:spPr>
+        <p:style>
+          <a:lnRef idx="1">
+            <a:schemeClr val="accent1"/>
+          </a:lnRef>
+          <a:fillRef idx="3">
+            <a:schemeClr val="accent1"/>
+          </a:fillRef>
+          <a:effectRef idx="2">
+            <a:schemeClr val="accent1"/>
+          </a:effectRef>
+          <a:fontRef idx="minor">
+            <a:schemeClr val="lt1"/>
+          </a:fontRef>
+        </p:style>
+        <p:txBody>
+          <a:bodyPr rtlCol="0" anchor="ctr" wrap="square"/>
+          <a:lstStyle/>
+          <a:p>
+            <a:pPr algn="l">
+              <a:defRPr sz="1000" b="1">
+                <a:solidFill>
+                  <a:srgbClr val="FFFFFF"/>
+                </a:solidFill>
+              </a:defRPr>
+            </a:pPr>
+            <a:r>
+              <a:t>17</a:t>
+            </a:r>
+          </a:p>
+          <a:p>
+            <a:pPr algn="ctr">
+              <a:defRPr sz="1100" b="1">
+                <a:solidFill>
+                  <a:srgbClr val="FFFFFF"/>
+                </a:solidFill>
+              </a:defRPr>
+            </a:pPr>
+            <a:r>
+              <a:t>Checklist + Cert.</a:t>
+            </a:r>
+          </a:p>
+          <a:p>
+            <a:pPr algn="ctr">
+              <a:defRPr sz="800">
+                <a:solidFill>
+                  <a:srgbClr val="FFFFFF"/>
+                </a:solidFill>
+              </a:defRPr>
+            </a:pPr>
+            <a:r>
+              <a:t>NR-01</a:t>
+            </a:r>
+          </a:p>
+          <a:p>
+            <a:pPr algn="ctr">
+              <a:defRPr sz="800">
+                <a:solidFill>
+                  <a:srgbClr val="FFFFFF"/>
+                </a:solidFill>
+              </a:defRPr>
+            </a:pPr>
+            <a:r>
+              <a:t>Emissao automatica</a:t>
             </a:r>
           </a:p>
         </p:txBody>
@@ -4758,7 +4946,7 @@
         </p:nvSpPr>
         <p:spPr>
           <a:xfrm>
-            <a:off x="274320" y="5669280"/>
+            <a:off x="274320" y="7498080"/>
             <a:ext cx="11612880" cy="457200"/>
           </a:xfrm>
           <a:prstGeom prst="roundRect">
@@ -4810,7 +4998,7 @@
         </p:nvSpPr>
         <p:spPr>
           <a:xfrm>
-            <a:off x="274320" y="6263640"/>
+            <a:off x="274320" y="8138160"/>
             <a:ext cx="11612880" cy="365760"/>
           </a:xfrm>
           <a:prstGeom prst="rect">
